--- a/images/figs.pptx
+++ b/images/figs.pptx
@@ -5,18 +5,21 @@
     <p:sldMasterId id="2147483648" r:id="rId1"/>
   </p:sldMasterIdLst>
   <p:notesMasterIdLst>
-    <p:notesMasterId r:id="rId11"/>
+    <p:notesMasterId r:id="rId14"/>
   </p:notesMasterIdLst>
   <p:sldIdLst>
     <p:sldId id="256" r:id="rId2"/>
-    <p:sldId id="257" r:id="rId3"/>
-    <p:sldId id="258" r:id="rId4"/>
-    <p:sldId id="259" r:id="rId5"/>
-    <p:sldId id="260" r:id="rId6"/>
-    <p:sldId id="264" r:id="rId7"/>
-    <p:sldId id="261" r:id="rId8"/>
-    <p:sldId id="262" r:id="rId9"/>
-    <p:sldId id="263" r:id="rId10"/>
+    <p:sldId id="266" r:id="rId3"/>
+    <p:sldId id="267" r:id="rId4"/>
+    <p:sldId id="257" r:id="rId5"/>
+    <p:sldId id="258" r:id="rId6"/>
+    <p:sldId id="259" r:id="rId7"/>
+    <p:sldId id="260" r:id="rId8"/>
+    <p:sldId id="264" r:id="rId9"/>
+    <p:sldId id="261" r:id="rId10"/>
+    <p:sldId id="262" r:id="rId11"/>
+    <p:sldId id="265" r:id="rId12"/>
+    <p:sldId id="263" r:id="rId13"/>
   </p:sldIdLst>
   <p:sldSz cx="12192000" cy="6858000"/>
   <p:notesSz cx="6858000" cy="9144000"/>
@@ -126,7 +129,7 @@
 <file path=ppt/revisionInfo.xml><?xml version="1.0" encoding="utf-8"?>
 <p1510:revInfo xmlns:a="http://schemas.openxmlformats.org/drawingml/2006/main" xmlns:r="http://schemas.openxmlformats.org/officeDocument/2006/relationships" xmlns:p1510="http://schemas.microsoft.com/office/powerpoint/2015/10/main">
   <p1510:revLst>
-    <p1510:client id="{F5AEAB20-53C7-E547-B110-CA366EDAD81F}" v="157" dt="2026-01-27T23:22:47.589"/>
+    <p1510:client id="{F5AEAB20-53C7-E547-B110-CA366EDAD81F}" v="186" dt="2026-02-16T12:51:22.398"/>
   </p1510:revLst>
 </p1510:revInfo>
 </file>
@@ -134,210 +137,14 @@
 <file path=ppt/changesInfos/changesInfo1.xml><?xml version="1.0" encoding="utf-8"?>
 <pc:chgInfo xmlns:a="http://schemas.openxmlformats.org/drawingml/2006/main" xmlns:r="http://schemas.openxmlformats.org/officeDocument/2006/relationships" xmlns:ac="http://schemas.microsoft.com/office/drawing/2013/main/command" xmlns:pc="http://schemas.microsoft.com/office/powerpoint/2013/main/command">
   <pc:docChgLst>
-    <pc:chgData name="Viswa Viswanathan" userId="eeb7c4cd-bdfa-4397-b7a5-e8e212654fbb" providerId="ADAL" clId="{455DE2C3-A8E5-5974-AAE2-AD9291CAFE23}"/>
+    <pc:chgData name="Viswa Viswanathan" userId="eeb7c4cd-bdfa-4397-b7a5-e8e212654fbb" providerId="ADAL" clId="{789CB485-5F3F-5DB7-AA3E-86007C2BD59C}"/>
     <pc:docChg chg="undo custSel addSld modSld">
-      <pc:chgData name="Viswa Viswanathan" userId="eeb7c4cd-bdfa-4397-b7a5-e8e212654fbb" providerId="ADAL" clId="{455DE2C3-A8E5-5974-AAE2-AD9291CAFE23}" dt="2026-01-12T17:01:29.882" v="342"/>
+      <pc:chgData name="Viswa Viswanathan" userId="eeb7c4cd-bdfa-4397-b7a5-e8e212654fbb" providerId="ADAL" clId="{789CB485-5F3F-5DB7-AA3E-86007C2BD59C}" dt="2026-02-16T20:55:56.693" v="877" actId="1076"/>
       <pc:docMkLst>
         <pc:docMk/>
       </pc:docMkLst>
       <pc:sldChg chg="addSp delSp modSp new mod">
-        <pc:chgData name="Viswa Viswanathan" userId="eeb7c4cd-bdfa-4397-b7a5-e8e212654fbb" providerId="ADAL" clId="{455DE2C3-A8E5-5974-AAE2-AD9291CAFE23}" dt="2026-01-09T15:06:58.558" v="264" actId="14100"/>
-        <pc:sldMkLst>
-          <pc:docMk/>
-          <pc:sldMk cId="609444070" sldId="258"/>
-        </pc:sldMkLst>
-        <pc:spChg chg="mod">
-          <ac:chgData name="Viswa Viswanathan" userId="eeb7c4cd-bdfa-4397-b7a5-e8e212654fbb" providerId="ADAL" clId="{455DE2C3-A8E5-5974-AAE2-AD9291CAFE23}" dt="2026-01-09T12:25:02.487" v="75"/>
-          <ac:spMkLst>
-            <pc:docMk/>
-            <pc:sldMk cId="609444070" sldId="258"/>
-            <ac:spMk id="5" creationId="{B172C85B-8D97-57CA-309D-A99979E46292}"/>
-          </ac:spMkLst>
-        </pc:spChg>
-        <pc:spChg chg="mod">
-          <ac:chgData name="Viswa Viswanathan" userId="eeb7c4cd-bdfa-4397-b7a5-e8e212654fbb" providerId="ADAL" clId="{455DE2C3-A8E5-5974-AAE2-AD9291CAFE23}" dt="2026-01-09T12:25:02.487" v="75"/>
-          <ac:spMkLst>
-            <pc:docMk/>
-            <pc:sldMk cId="609444070" sldId="258"/>
-            <ac:spMk id="9" creationId="{70A15EFD-DC75-FB1F-380D-12B1696C791D}"/>
-          </ac:spMkLst>
-        </pc:spChg>
-        <pc:spChg chg="add mod">
-          <ac:chgData name="Viswa Viswanathan" userId="eeb7c4cd-bdfa-4397-b7a5-e8e212654fbb" providerId="ADAL" clId="{455DE2C3-A8E5-5974-AAE2-AD9291CAFE23}" dt="2026-01-09T12:25:23.861" v="101" actId="313"/>
-          <ac:spMkLst>
-            <pc:docMk/>
-            <pc:sldMk cId="609444070" sldId="258"/>
-            <ac:spMk id="10" creationId="{EEA042CA-F4FD-CA3E-8088-D4F50083D1F4}"/>
-          </ac:spMkLst>
-        </pc:spChg>
-        <pc:spChg chg="mod">
-          <ac:chgData name="Viswa Viswanathan" userId="eeb7c4cd-bdfa-4397-b7a5-e8e212654fbb" providerId="ADAL" clId="{455DE2C3-A8E5-5974-AAE2-AD9291CAFE23}" dt="2026-01-09T14:50:14.287" v="110" actId="1076"/>
-          <ac:spMkLst>
-            <pc:docMk/>
-            <pc:sldMk cId="609444070" sldId="258"/>
-            <ac:spMk id="12" creationId="{85713940-DAC1-FE6A-2A33-9EB5F27756FF}"/>
-          </ac:spMkLst>
-        </pc:spChg>
-        <pc:spChg chg="mod">
-          <ac:chgData name="Viswa Viswanathan" userId="eeb7c4cd-bdfa-4397-b7a5-e8e212654fbb" providerId="ADAL" clId="{455DE2C3-A8E5-5974-AAE2-AD9291CAFE23}" dt="2026-01-09T14:50:38.328" v="130" actId="14100"/>
-          <ac:spMkLst>
-            <pc:docMk/>
-            <pc:sldMk cId="609444070" sldId="258"/>
-            <ac:spMk id="13" creationId="{AC180B81-C0F3-9C61-DB51-1D17090E4A11}"/>
-          </ac:spMkLst>
-        </pc:spChg>
-        <pc:spChg chg="mod">
-          <ac:chgData name="Viswa Viswanathan" userId="eeb7c4cd-bdfa-4397-b7a5-e8e212654fbb" providerId="ADAL" clId="{455DE2C3-A8E5-5974-AAE2-AD9291CAFE23}" dt="2026-01-09T15:06:58.558" v="264" actId="14100"/>
-          <ac:spMkLst>
-            <pc:docMk/>
-            <pc:sldMk cId="609444070" sldId="258"/>
-            <ac:spMk id="14" creationId="{C778A9EF-D233-D732-06FE-9DFBC6B877CE}"/>
-          </ac:spMkLst>
-        </pc:spChg>
-        <pc:grpChg chg="add mod">
-          <ac:chgData name="Viswa Viswanathan" userId="eeb7c4cd-bdfa-4397-b7a5-e8e212654fbb" providerId="ADAL" clId="{455DE2C3-A8E5-5974-AAE2-AD9291CAFE23}" dt="2026-01-09T14:49:36.026" v="103" actId="1076"/>
-          <ac:grpSpMkLst>
-            <pc:docMk/>
-            <pc:sldMk cId="609444070" sldId="258"/>
-            <ac:grpSpMk id="4" creationId="{BFF3CFC2-0467-9408-1DB7-62442CED97BD}"/>
-          </ac:grpSpMkLst>
-        </pc:grpChg>
-        <pc:grpChg chg="add mod">
-          <ac:chgData name="Viswa Viswanathan" userId="eeb7c4cd-bdfa-4397-b7a5-e8e212654fbb" providerId="ADAL" clId="{455DE2C3-A8E5-5974-AAE2-AD9291CAFE23}" dt="2026-01-09T14:53:30.267" v="190" actId="1076"/>
-          <ac:grpSpMkLst>
-            <pc:docMk/>
-            <pc:sldMk cId="609444070" sldId="258"/>
-            <ac:grpSpMk id="11" creationId="{F62253B4-A4F5-CEE5-D7D3-1E36CE0908D8}"/>
-          </ac:grpSpMkLst>
-        </pc:grpChg>
-      </pc:sldChg>
-      <pc:sldChg chg="delSp modSp add mod">
-        <pc:chgData name="Viswa Viswanathan" userId="eeb7c4cd-bdfa-4397-b7a5-e8e212654fbb" providerId="ADAL" clId="{455DE2C3-A8E5-5974-AAE2-AD9291CAFE23}" dt="2026-01-09T14:59:23.392" v="263" actId="20577"/>
-        <pc:sldMkLst>
-          <pc:docMk/>
-          <pc:sldMk cId="3480885725" sldId="259"/>
-        </pc:sldMkLst>
-        <pc:spChg chg="mod">
-          <ac:chgData name="Viswa Viswanathan" userId="eeb7c4cd-bdfa-4397-b7a5-e8e212654fbb" providerId="ADAL" clId="{455DE2C3-A8E5-5974-AAE2-AD9291CAFE23}" dt="2026-01-09T14:57:47.749" v="197" actId="1076"/>
-          <ac:spMkLst>
-            <pc:docMk/>
-            <pc:sldMk cId="3480885725" sldId="259"/>
-            <ac:spMk id="5" creationId="{356E47AC-5DB7-AA18-A756-443475D1D478}"/>
-          </ac:spMkLst>
-        </pc:spChg>
-        <pc:spChg chg="mod">
-          <ac:chgData name="Viswa Viswanathan" userId="eeb7c4cd-bdfa-4397-b7a5-e8e212654fbb" providerId="ADAL" clId="{455DE2C3-A8E5-5974-AAE2-AD9291CAFE23}" dt="2026-01-09T14:59:17.678" v="262" actId="14100"/>
-          <ac:spMkLst>
-            <pc:docMk/>
-            <pc:sldMk cId="3480885725" sldId="259"/>
-            <ac:spMk id="9" creationId="{65BFA266-A513-816A-418F-60B9A2257897}"/>
-          </ac:spMkLst>
-        </pc:spChg>
-        <pc:spChg chg="mod">
-          <ac:chgData name="Viswa Viswanathan" userId="eeb7c4cd-bdfa-4397-b7a5-e8e212654fbb" providerId="ADAL" clId="{455DE2C3-A8E5-5974-AAE2-AD9291CAFE23}" dt="2026-01-09T14:59:23.392" v="263" actId="20577"/>
-          <ac:spMkLst>
-            <pc:docMk/>
-            <pc:sldMk cId="3480885725" sldId="259"/>
-            <ac:spMk id="10" creationId="{4E322EA4-78C7-E42A-FA8D-3AD8F7D1D7A1}"/>
-          </ac:spMkLst>
-        </pc:spChg>
-      </pc:sldChg>
-      <pc:sldChg chg="addSp delSp modSp new mod">
-        <pc:chgData name="Viswa Viswanathan" userId="eeb7c4cd-bdfa-4397-b7a5-e8e212654fbb" providerId="ADAL" clId="{455DE2C3-A8E5-5974-AAE2-AD9291CAFE23}" dt="2026-01-09T17:36:45.972" v="275" actId="732"/>
-        <pc:sldMkLst>
-          <pc:docMk/>
-          <pc:sldMk cId="2369186413" sldId="260"/>
-        </pc:sldMkLst>
-        <pc:picChg chg="add mod modCrop">
-          <ac:chgData name="Viswa Viswanathan" userId="eeb7c4cd-bdfa-4397-b7a5-e8e212654fbb" providerId="ADAL" clId="{455DE2C3-A8E5-5974-AAE2-AD9291CAFE23}" dt="2026-01-09T17:36:45.972" v="275" actId="732"/>
-          <ac:picMkLst>
-            <pc:docMk/>
-            <pc:sldMk cId="2369186413" sldId="260"/>
-            <ac:picMk id="4" creationId="{C1D18C90-B2B4-E086-9392-140022CB4D03}"/>
-          </ac:picMkLst>
-        </pc:picChg>
-      </pc:sldChg>
-      <pc:sldChg chg="addSp delSp modSp new mod">
-        <pc:chgData name="Viswa Viswanathan" userId="eeb7c4cd-bdfa-4397-b7a5-e8e212654fbb" providerId="ADAL" clId="{455DE2C3-A8E5-5974-AAE2-AD9291CAFE23}" dt="2026-01-12T17:01:29.882" v="342"/>
-        <pc:sldMkLst>
-          <pc:docMk/>
-          <pc:sldMk cId="497765789" sldId="261"/>
-        </pc:sldMkLst>
-        <pc:picChg chg="add mod">
-          <ac:chgData name="Viswa Viswanathan" userId="eeb7c4cd-bdfa-4397-b7a5-e8e212654fbb" providerId="ADAL" clId="{455DE2C3-A8E5-5974-AAE2-AD9291CAFE23}" dt="2026-01-12T17:01:29.882" v="342"/>
-          <ac:picMkLst>
-            <pc:docMk/>
-            <pc:sldMk cId="497765789" sldId="261"/>
-            <ac:picMk id="12" creationId="{0B15638C-1110-61AB-0820-BA0F66D78E49}"/>
-          </ac:picMkLst>
-        </pc:picChg>
-      </pc:sldChg>
-    </pc:docChg>
-  </pc:docChgLst>
-  <pc:docChgLst>
-    <pc:chgData name="Viswa Viswanathan" userId="eeb7c4cd-bdfa-4397-b7a5-e8e212654fbb" providerId="ADAL" clId="{789CB485-5F3F-5DB7-AA3E-86007C2BD59C}"/>
-    <pc:docChg chg="undo custSel addSld modSld">
-      <pc:chgData name="Viswa Viswanathan" userId="eeb7c4cd-bdfa-4397-b7a5-e8e212654fbb" providerId="ADAL" clId="{789CB485-5F3F-5DB7-AA3E-86007C2BD59C}" dt="2026-01-27T23:23:20.327" v="607" actId="1038"/>
-      <pc:docMkLst>
-        <pc:docMk/>
-      </pc:docMkLst>
-      <pc:sldChg chg="addSp delSp modSp add mod">
-        <pc:chgData name="Viswa Viswanathan" userId="eeb7c4cd-bdfa-4397-b7a5-e8e212654fbb" providerId="ADAL" clId="{789CB485-5F3F-5DB7-AA3E-86007C2BD59C}" dt="2026-01-06T17:10:50.694" v="49" actId="1076"/>
-        <pc:sldMkLst>
-          <pc:docMk/>
-          <pc:sldMk cId="4208986912" sldId="257"/>
-        </pc:sldMkLst>
-        <pc:spChg chg="add mod">
-          <ac:chgData name="Viswa Viswanathan" userId="eeb7c4cd-bdfa-4397-b7a5-e8e212654fbb" providerId="ADAL" clId="{789CB485-5F3F-5DB7-AA3E-86007C2BD59C}" dt="2026-01-06T17:10:30.908" v="48" actId="1076"/>
-          <ac:spMkLst>
-            <pc:docMk/>
-            <pc:sldMk cId="4208986912" sldId="257"/>
-            <ac:spMk id="2" creationId="{8ADF71F1-85EE-74B4-6265-B7EFBAAF78B9}"/>
-          </ac:spMkLst>
-        </pc:spChg>
-        <pc:spChg chg="mod">
-          <ac:chgData name="Viswa Viswanathan" userId="eeb7c4cd-bdfa-4397-b7a5-e8e212654fbb" providerId="ADAL" clId="{789CB485-5F3F-5DB7-AA3E-86007C2BD59C}" dt="2026-01-06T17:08:11.183" v="9"/>
-          <ac:spMkLst>
-            <pc:docMk/>
-            <pc:sldMk cId="4208986912" sldId="257"/>
-            <ac:spMk id="10" creationId="{F29DBCCC-F30D-21BB-2448-F615FE04D62D}"/>
-          </ac:spMkLst>
-        </pc:spChg>
-        <pc:spChg chg="mod">
-          <ac:chgData name="Viswa Viswanathan" userId="eeb7c4cd-bdfa-4397-b7a5-e8e212654fbb" providerId="ADAL" clId="{789CB485-5F3F-5DB7-AA3E-86007C2BD59C}" dt="2026-01-06T17:08:11.183" v="9"/>
-          <ac:spMkLst>
-            <pc:docMk/>
-            <pc:sldMk cId="4208986912" sldId="257"/>
-            <ac:spMk id="11" creationId="{395ACB1E-281A-D31B-6EFC-7164C927BBAB}"/>
-          </ac:spMkLst>
-        </pc:spChg>
-        <pc:spChg chg="mod">
-          <ac:chgData name="Viswa Viswanathan" userId="eeb7c4cd-bdfa-4397-b7a5-e8e212654fbb" providerId="ADAL" clId="{789CB485-5F3F-5DB7-AA3E-86007C2BD59C}" dt="2026-01-06T17:08:11.183" v="9"/>
-          <ac:spMkLst>
-            <pc:docMk/>
-            <pc:sldMk cId="4208986912" sldId="257"/>
-            <ac:spMk id="12" creationId="{ABDC464D-84BA-FD93-9F9D-6E48C60E2F43}"/>
-          </ac:spMkLst>
-        </pc:spChg>
-        <pc:spChg chg="mod">
-          <ac:chgData name="Viswa Viswanathan" userId="eeb7c4cd-bdfa-4397-b7a5-e8e212654fbb" providerId="ADAL" clId="{789CB485-5F3F-5DB7-AA3E-86007C2BD59C}" dt="2026-01-06T17:08:11.183" v="9"/>
-          <ac:spMkLst>
-            <pc:docMk/>
-            <pc:sldMk cId="4208986912" sldId="257"/>
-            <ac:spMk id="13" creationId="{4381E3ED-13B9-6812-CC2B-327709A1DF65}"/>
-          </ac:spMkLst>
-        </pc:spChg>
-        <pc:grpChg chg="mod">
-          <ac:chgData name="Viswa Viswanathan" userId="eeb7c4cd-bdfa-4397-b7a5-e8e212654fbb" providerId="ADAL" clId="{789CB485-5F3F-5DB7-AA3E-86007C2BD59C}" dt="2026-01-06T17:10:50.694" v="49" actId="1076"/>
-          <ac:grpSpMkLst>
-            <pc:docMk/>
-            <pc:sldMk cId="4208986912" sldId="257"/>
-            <ac:grpSpMk id="15" creationId="{931196B9-93A6-21D3-0054-CC497954D1B8}"/>
-          </ac:grpSpMkLst>
-        </pc:grpChg>
-      </pc:sldChg>
-      <pc:sldChg chg="addSp delSp modSp new mod">
-        <pc:chgData name="Viswa Viswanathan" userId="eeb7c4cd-bdfa-4397-b7a5-e8e212654fbb" providerId="ADAL" clId="{789CB485-5F3F-5DB7-AA3E-86007C2BD59C}" dt="2026-01-27T23:23:20.327" v="607" actId="1038"/>
+        <pc:chgData name="Viswa Viswanathan" userId="eeb7c4cd-bdfa-4397-b7a5-e8e212654fbb" providerId="ADAL" clId="{789CB485-5F3F-5DB7-AA3E-86007C2BD59C}" dt="2026-02-13T00:42:49.301" v="728" actId="14100"/>
         <pc:sldMkLst>
           <pc:docMk/>
           <pc:sldMk cId="911215209" sldId="262"/>
@@ -367,7 +174,7 @@
           </ac:spMkLst>
         </pc:spChg>
         <pc:spChg chg="mod">
-          <ac:chgData name="Viswa Viswanathan" userId="eeb7c4cd-bdfa-4397-b7a5-e8e212654fbb" providerId="ADAL" clId="{789CB485-5F3F-5DB7-AA3E-86007C2BD59C}" dt="2026-01-23T23:42:46.944" v="406" actId="20577"/>
+          <ac:chgData name="Viswa Viswanathan" userId="eeb7c4cd-bdfa-4397-b7a5-e8e212654fbb" providerId="ADAL" clId="{789CB485-5F3F-5DB7-AA3E-86007C2BD59C}" dt="2026-02-13T00:42:39.565" v="726" actId="20577"/>
           <ac:spMkLst>
             <pc:docMk/>
             <pc:sldMk cId="911215209" sldId="262"/>
@@ -391,7 +198,7 @@
           </ac:spMkLst>
         </pc:spChg>
         <pc:spChg chg="mod">
-          <ac:chgData name="Viswa Viswanathan" userId="eeb7c4cd-bdfa-4397-b7a5-e8e212654fbb" providerId="ADAL" clId="{789CB485-5F3F-5DB7-AA3E-86007C2BD59C}" dt="2026-01-27T23:22:47.589" v="526" actId="20577"/>
+          <ac:chgData name="Viswa Viswanathan" userId="eeb7c4cd-bdfa-4397-b7a5-e8e212654fbb" providerId="ADAL" clId="{789CB485-5F3F-5DB7-AA3E-86007C2BD59C}" dt="2026-02-13T00:40:30.050" v="618" actId="14100"/>
           <ac:spMkLst>
             <pc:docMk/>
             <pc:sldMk cId="911215209" sldId="262"/>
@@ -399,7 +206,7 @@
           </ac:spMkLst>
         </pc:spChg>
         <pc:spChg chg="mod">
-          <ac:chgData name="Viswa Viswanathan" userId="eeb7c4cd-bdfa-4397-b7a5-e8e212654fbb" providerId="ADAL" clId="{789CB485-5F3F-5DB7-AA3E-86007C2BD59C}" dt="2026-01-27T23:22:47.589" v="526" actId="20577"/>
+          <ac:chgData name="Viswa Viswanathan" userId="eeb7c4cd-bdfa-4397-b7a5-e8e212654fbb" providerId="ADAL" clId="{789CB485-5F3F-5DB7-AA3E-86007C2BD59C}" dt="2026-02-13T00:41:51.202" v="714" actId="14100"/>
           <ac:spMkLst>
             <pc:docMk/>
             <pc:sldMk cId="911215209" sldId="262"/>
@@ -439,15 +246,15 @@
           </ac:grpSpMkLst>
         </pc:grpChg>
         <pc:grpChg chg="add mod">
-          <ac:chgData name="Viswa Viswanathan" userId="eeb7c4cd-bdfa-4397-b7a5-e8e212654fbb" providerId="ADAL" clId="{789CB485-5F3F-5DB7-AA3E-86007C2BD59C}" dt="2026-01-27T23:23:20.327" v="607" actId="1038"/>
+          <ac:chgData name="Viswa Viswanathan" userId="eeb7c4cd-bdfa-4397-b7a5-e8e212654fbb" providerId="ADAL" clId="{789CB485-5F3F-5DB7-AA3E-86007C2BD59C}" dt="2026-02-13T00:42:05.501" v="715" actId="14100"/>
           <ac:grpSpMkLst>
             <pc:docMk/>
             <pc:sldMk cId="911215209" sldId="262"/>
             <ac:grpSpMk id="28" creationId="{E6131264-CD0A-08D7-1D35-652C809C006B}"/>
           </ac:grpSpMkLst>
         </pc:grpChg>
-        <pc:grpChg chg="add">
-          <ac:chgData name="Viswa Viswanathan" userId="eeb7c4cd-bdfa-4397-b7a5-e8e212654fbb" providerId="ADAL" clId="{789CB485-5F3F-5DB7-AA3E-86007C2BD59C}" dt="2026-01-27T23:12:46.774" v="507" actId="164"/>
+        <pc:grpChg chg="add mod">
+          <ac:chgData name="Viswa Viswanathan" userId="eeb7c4cd-bdfa-4397-b7a5-e8e212654fbb" providerId="ADAL" clId="{789CB485-5F3F-5DB7-AA3E-86007C2BD59C}" dt="2026-02-13T00:42:49.301" v="728" actId="14100"/>
           <ac:grpSpMkLst>
             <pc:docMk/>
             <pc:sldMk cId="911215209" sldId="262"/>
@@ -495,7 +302,7 @@
           </ac:cxnSpMkLst>
         </pc:cxnChg>
         <pc:cxnChg chg="mod">
-          <ac:chgData name="Viswa Viswanathan" userId="eeb7c4cd-bdfa-4397-b7a5-e8e212654fbb" providerId="ADAL" clId="{789CB485-5F3F-5DB7-AA3E-86007C2BD59C}" dt="2026-01-27T23:22:47.589" v="526" actId="20577"/>
+          <ac:chgData name="Viswa Viswanathan" userId="eeb7c4cd-bdfa-4397-b7a5-e8e212654fbb" providerId="ADAL" clId="{789CB485-5F3F-5DB7-AA3E-86007C2BD59C}" dt="2026-02-13T00:41:05.856" v="711" actId="1038"/>
           <ac:cxnSpMkLst>
             <pc:docMk/>
             <pc:sldMk cId="911215209" sldId="262"/>
@@ -605,6 +412,123 @@
           </ac:grpSpMkLst>
         </pc:grpChg>
       </pc:sldChg>
+      <pc:sldChg chg="addSp delSp modSp new mod">
+        <pc:chgData name="Viswa Viswanathan" userId="eeb7c4cd-bdfa-4397-b7a5-e8e212654fbb" providerId="ADAL" clId="{789CB485-5F3F-5DB7-AA3E-86007C2BD59C}" dt="2026-02-13T00:52:22.254" v="743" actId="1076"/>
+        <pc:sldMkLst>
+          <pc:docMk/>
+          <pc:sldMk cId="2055721291" sldId="265"/>
+        </pc:sldMkLst>
+        <pc:picChg chg="add mod">
+          <ac:chgData name="Viswa Viswanathan" userId="eeb7c4cd-bdfa-4397-b7a5-e8e212654fbb" providerId="ADAL" clId="{789CB485-5F3F-5DB7-AA3E-86007C2BD59C}" dt="2026-02-13T00:49:46.810" v="738" actId="1076"/>
+          <ac:picMkLst>
+            <pc:docMk/>
+            <pc:sldMk cId="2055721291" sldId="265"/>
+            <ac:picMk id="5" creationId="{DE867D86-D6A9-27B6-ECB6-4CFB81670512}"/>
+          </ac:picMkLst>
+        </pc:picChg>
+        <pc:picChg chg="add mod">
+          <ac:chgData name="Viswa Viswanathan" userId="eeb7c4cd-bdfa-4397-b7a5-e8e212654fbb" providerId="ADAL" clId="{789CB485-5F3F-5DB7-AA3E-86007C2BD59C}" dt="2026-02-13T00:52:22.254" v="743" actId="1076"/>
+          <ac:picMkLst>
+            <pc:docMk/>
+            <pc:sldMk cId="2055721291" sldId="265"/>
+            <ac:picMk id="7" creationId="{B8B7AC29-D6D6-BE9B-3DAE-E85BD4B336A6}"/>
+          </ac:picMkLst>
+        </pc:picChg>
+      </pc:sldChg>
+      <pc:sldChg chg="addSp delSp modSp new mod">
+        <pc:chgData name="Viswa Viswanathan" userId="eeb7c4cd-bdfa-4397-b7a5-e8e212654fbb" providerId="ADAL" clId="{789CB485-5F3F-5DB7-AA3E-86007C2BD59C}" dt="2026-02-16T12:52:34.699" v="869" actId="164"/>
+        <pc:sldMkLst>
+          <pc:docMk/>
+          <pc:sldMk cId="2434184301" sldId="266"/>
+        </pc:sldMkLst>
+        <pc:spChg chg="add del">
+          <ac:chgData name="Viswa Viswanathan" userId="eeb7c4cd-bdfa-4397-b7a5-e8e212654fbb" providerId="ADAL" clId="{789CB485-5F3F-5DB7-AA3E-86007C2BD59C}" dt="2026-02-16T12:46:37.338" v="761" actId="478"/>
+          <ac:spMkLst>
+            <pc:docMk/>
+            <pc:sldMk cId="2434184301" sldId="266"/>
+            <ac:spMk id="5" creationId="{F54E869D-D466-D205-E91A-BE108F107C40}"/>
+          </ac:spMkLst>
+        </pc:spChg>
+        <pc:spChg chg="add mod">
+          <ac:chgData name="Viswa Viswanathan" userId="eeb7c4cd-bdfa-4397-b7a5-e8e212654fbb" providerId="ADAL" clId="{789CB485-5F3F-5DB7-AA3E-86007C2BD59C}" dt="2026-02-16T12:49:18.747" v="855" actId="2085"/>
+          <ac:spMkLst>
+            <pc:docMk/>
+            <pc:sldMk cId="2434184301" sldId="266"/>
+            <ac:spMk id="9" creationId="{94EAFAB5-E6F0-57A3-777B-A2FE9110C080}"/>
+          </ac:spMkLst>
+        </pc:spChg>
+        <pc:spChg chg="add mod">
+          <ac:chgData name="Viswa Viswanathan" userId="eeb7c4cd-bdfa-4397-b7a5-e8e212654fbb" providerId="ADAL" clId="{789CB485-5F3F-5DB7-AA3E-86007C2BD59C}" dt="2026-02-16T12:50:22.380" v="858" actId="2085"/>
+          <ac:spMkLst>
+            <pc:docMk/>
+            <pc:sldMk cId="2434184301" sldId="266"/>
+            <ac:spMk id="10" creationId="{1F0B51F8-A916-CEDA-7C5C-E8D729956811}"/>
+          </ac:spMkLst>
+        </pc:spChg>
+        <pc:spChg chg="add mod">
+          <ac:chgData name="Viswa Viswanathan" userId="eeb7c4cd-bdfa-4397-b7a5-e8e212654fbb" providerId="ADAL" clId="{789CB485-5F3F-5DB7-AA3E-86007C2BD59C}" dt="2026-02-16T12:50:53.309" v="862" actId="2085"/>
+          <ac:spMkLst>
+            <pc:docMk/>
+            <pc:sldMk cId="2434184301" sldId="266"/>
+            <ac:spMk id="11" creationId="{92473D3E-6E9E-6542-2577-34925DC8CB98}"/>
+          </ac:spMkLst>
+        </pc:spChg>
+        <pc:grpChg chg="add">
+          <ac:chgData name="Viswa Viswanathan" userId="eeb7c4cd-bdfa-4397-b7a5-e8e212654fbb" providerId="ADAL" clId="{789CB485-5F3F-5DB7-AA3E-86007C2BD59C}" dt="2026-02-16T12:52:34.699" v="869" actId="164"/>
+          <ac:grpSpMkLst>
+            <pc:docMk/>
+            <pc:sldMk cId="2434184301" sldId="266"/>
+            <ac:grpSpMk id="12" creationId="{E9D93F08-1FB8-6BB6-CEFB-5B4095CD8CA5}"/>
+          </ac:grpSpMkLst>
+        </pc:grpChg>
+        <pc:picChg chg="add mod modCrop">
+          <ac:chgData name="Viswa Viswanathan" userId="eeb7c4cd-bdfa-4397-b7a5-e8e212654fbb" providerId="ADAL" clId="{789CB485-5F3F-5DB7-AA3E-86007C2BD59C}" dt="2026-02-16T12:45:50.150" v="759" actId="1076"/>
+          <ac:picMkLst>
+            <pc:docMk/>
+            <pc:sldMk cId="2434184301" sldId="266"/>
+            <ac:picMk id="3" creationId="{C13DE27C-2108-116D-D4FE-A2DCFDE43E41}"/>
+          </ac:picMkLst>
+        </pc:picChg>
+        <pc:picChg chg="add mod modCrop">
+          <ac:chgData name="Viswa Viswanathan" userId="eeb7c4cd-bdfa-4397-b7a5-e8e212654fbb" providerId="ADAL" clId="{789CB485-5F3F-5DB7-AA3E-86007C2BD59C}" dt="2026-02-16T12:51:56.432" v="868" actId="14100"/>
+          <ac:picMkLst>
+            <pc:docMk/>
+            <pc:sldMk cId="2434184301" sldId="266"/>
+            <ac:picMk id="6" creationId="{50110B58-8B40-D18E-FD50-3F57A55DD3A0}"/>
+          </ac:picMkLst>
+        </pc:picChg>
+        <pc:picChg chg="add mod">
+          <ac:chgData name="Viswa Viswanathan" userId="eeb7c4cd-bdfa-4397-b7a5-e8e212654fbb" providerId="ADAL" clId="{789CB485-5F3F-5DB7-AA3E-86007C2BD59C}" dt="2026-02-16T12:47:35.843" v="768" actId="14100"/>
+          <ac:picMkLst>
+            <pc:docMk/>
+            <pc:sldMk cId="2434184301" sldId="266"/>
+            <ac:picMk id="7" creationId="{EA58BB5D-3CB8-60DF-04FA-2D1FAE8AE8C1}"/>
+          </ac:picMkLst>
+        </pc:picChg>
+        <pc:picChg chg="add mod">
+          <ac:chgData name="Viswa Viswanathan" userId="eeb7c4cd-bdfa-4397-b7a5-e8e212654fbb" providerId="ADAL" clId="{789CB485-5F3F-5DB7-AA3E-86007C2BD59C}" dt="2026-02-16T12:48:52.942" v="852" actId="14100"/>
+          <ac:picMkLst>
+            <pc:docMk/>
+            <pc:sldMk cId="2434184301" sldId="266"/>
+            <ac:picMk id="8" creationId="{3F5F044A-1777-8454-1AAB-F42DD3D43E61}"/>
+          </ac:picMkLst>
+        </pc:picChg>
+      </pc:sldChg>
+      <pc:sldChg chg="addSp modSp new mod">
+        <pc:chgData name="Viswa Viswanathan" userId="eeb7c4cd-bdfa-4397-b7a5-e8e212654fbb" providerId="ADAL" clId="{789CB485-5F3F-5DB7-AA3E-86007C2BD59C}" dt="2026-02-16T20:55:56.693" v="877" actId="1076"/>
+        <pc:sldMkLst>
+          <pc:docMk/>
+          <pc:sldMk cId="3148305379" sldId="267"/>
+        </pc:sldMkLst>
+        <pc:picChg chg="add mod modCrop">
+          <ac:chgData name="Viswa Viswanathan" userId="eeb7c4cd-bdfa-4397-b7a5-e8e212654fbb" providerId="ADAL" clId="{789CB485-5F3F-5DB7-AA3E-86007C2BD59C}" dt="2026-02-16T20:55:56.693" v="877" actId="1076"/>
+          <ac:picMkLst>
+            <pc:docMk/>
+            <pc:sldMk cId="3148305379" sldId="267"/>
+            <ac:picMk id="3" creationId="{6D56B31F-3A54-FDB9-BEF3-8DC602807C9A}"/>
+          </ac:picMkLst>
+        </pc:picChg>
+      </pc:sldChg>
     </pc:docChg>
   </pc:docChgLst>
 </pc:chgInfo>
@@ -692,7 +616,7 @@
           <a:p>
             <a:fld id="{881A2B08-CF5C-DF47-8D7F-848C0AE3F928}" type="datetimeFigureOut">
               <a:rPr lang="en-US" smtClean="0"/>
-              <a:t>1/23/26</a:t>
+              <a:t>2/16/26</a:t>
             </a:fld>
             <a:endParaRPr lang="en-US"/>
           </a:p>
@@ -1024,7 +948,7 @@
           <a:p>
             <a:fld id="{A26EDFF5-7C57-844A-878E-F94030E79825}" type="slidenum">
               <a:rPr lang="en-US" smtClean="0"/>
-              <a:t>7</a:t>
+              <a:t>9</a:t>
             </a:fld>
             <a:endParaRPr lang="en-US"/>
           </a:p>
@@ -1190,7 +1114,7 @@
           <a:p>
             <a:fld id="{6FB1118E-0B00-8740-91F6-6173C96993E6}" type="datetimeFigureOut">
               <a:rPr lang="en-US" smtClean="0"/>
-              <a:t>1/23/26</a:t>
+              <a:t>2/16/26</a:t>
             </a:fld>
             <a:endParaRPr lang="en-US"/>
           </a:p>
@@ -1388,7 +1312,7 @@
           <a:p>
             <a:fld id="{6FB1118E-0B00-8740-91F6-6173C96993E6}" type="datetimeFigureOut">
               <a:rPr lang="en-US" smtClean="0"/>
-              <a:t>1/23/26</a:t>
+              <a:t>2/16/26</a:t>
             </a:fld>
             <a:endParaRPr lang="en-US"/>
           </a:p>
@@ -1596,7 +1520,7 @@
           <a:p>
             <a:fld id="{6FB1118E-0B00-8740-91F6-6173C96993E6}" type="datetimeFigureOut">
               <a:rPr lang="en-US" smtClean="0"/>
-              <a:t>1/23/26</a:t>
+              <a:t>2/16/26</a:t>
             </a:fld>
             <a:endParaRPr lang="en-US"/>
           </a:p>
@@ -1794,7 +1718,7 @@
           <a:p>
             <a:fld id="{6FB1118E-0B00-8740-91F6-6173C96993E6}" type="datetimeFigureOut">
               <a:rPr lang="en-US" smtClean="0"/>
-              <a:t>1/23/26</a:t>
+              <a:t>2/16/26</a:t>
             </a:fld>
             <a:endParaRPr lang="en-US"/>
           </a:p>
@@ -2069,7 +1993,7 @@
           <a:p>
             <a:fld id="{6FB1118E-0B00-8740-91F6-6173C96993E6}" type="datetimeFigureOut">
               <a:rPr lang="en-US" smtClean="0"/>
-              <a:t>1/23/26</a:t>
+              <a:t>2/16/26</a:t>
             </a:fld>
             <a:endParaRPr lang="en-US"/>
           </a:p>
@@ -2334,7 +2258,7 @@
           <a:p>
             <a:fld id="{6FB1118E-0B00-8740-91F6-6173C96993E6}" type="datetimeFigureOut">
               <a:rPr lang="en-US" smtClean="0"/>
-              <a:t>1/23/26</a:t>
+              <a:t>2/16/26</a:t>
             </a:fld>
             <a:endParaRPr lang="en-US"/>
           </a:p>
@@ -2746,7 +2670,7 @@
           <a:p>
             <a:fld id="{6FB1118E-0B00-8740-91F6-6173C96993E6}" type="datetimeFigureOut">
               <a:rPr lang="en-US" smtClean="0"/>
-              <a:t>1/23/26</a:t>
+              <a:t>2/16/26</a:t>
             </a:fld>
             <a:endParaRPr lang="en-US"/>
           </a:p>
@@ -2887,7 +2811,7 @@
           <a:p>
             <a:fld id="{6FB1118E-0B00-8740-91F6-6173C96993E6}" type="datetimeFigureOut">
               <a:rPr lang="en-US" smtClean="0"/>
-              <a:t>1/23/26</a:t>
+              <a:t>2/16/26</a:t>
             </a:fld>
             <a:endParaRPr lang="en-US"/>
           </a:p>
@@ -3000,7 +2924,7 @@
           <a:p>
             <a:fld id="{6FB1118E-0B00-8740-91F6-6173C96993E6}" type="datetimeFigureOut">
               <a:rPr lang="en-US" smtClean="0"/>
-              <a:t>1/23/26</a:t>
+              <a:t>2/16/26</a:t>
             </a:fld>
             <a:endParaRPr lang="en-US"/>
           </a:p>
@@ -3311,7 +3235,7 @@
           <a:p>
             <a:fld id="{6FB1118E-0B00-8740-91F6-6173C96993E6}" type="datetimeFigureOut">
               <a:rPr lang="en-US" smtClean="0"/>
-              <a:t>1/23/26</a:t>
+              <a:t>2/16/26</a:t>
             </a:fld>
             <a:endParaRPr lang="en-US"/>
           </a:p>
@@ -3599,7 +3523,7 @@
           <a:p>
             <a:fld id="{6FB1118E-0B00-8740-91F6-6173C96993E6}" type="datetimeFigureOut">
               <a:rPr lang="en-US" smtClean="0"/>
-              <a:t>1/23/26</a:t>
+              <a:t>2/16/26</a:t>
             </a:fld>
             <a:endParaRPr lang="en-US"/>
           </a:p>
@@ -3840,7 +3764,7 @@
           <a:p>
             <a:fld id="{6FB1118E-0B00-8740-91F6-6173C96993E6}" type="datetimeFigureOut">
               <a:rPr lang="en-US" smtClean="0"/>
-              <a:t>1/23/26</a:t>
+              <a:t>2/16/26</a:t>
             </a:fld>
             <a:endParaRPr lang="en-US"/>
           </a:p>
@@ -4859,7 +4783,2165 @@
 </p:sld>
 </file>
 
+<file path=ppt/slides/slide10.xml><?xml version="1.0" encoding="utf-8"?>
+<p:sld xmlns:a="http://schemas.openxmlformats.org/drawingml/2006/main" xmlns:r="http://schemas.openxmlformats.org/officeDocument/2006/relationships" xmlns:p="http://schemas.openxmlformats.org/presentationml/2006/main">
+  <p:cSld>
+    <p:spTree>
+      <p:nvGrpSpPr>
+        <p:cNvPr id="1" name=""/>
+        <p:cNvGrpSpPr/>
+        <p:nvPr/>
+      </p:nvGrpSpPr>
+      <p:grpSpPr>
+        <a:xfrm>
+          <a:off x="0" y="0"/>
+          <a:ext cx="0" cy="0"/>
+          <a:chOff x="0" y="0"/>
+          <a:chExt cx="0" cy="0"/>
+        </a:xfrm>
+      </p:grpSpPr>
+      <p:grpSp>
+        <p:nvGrpSpPr>
+          <p:cNvPr id="13" name="Group 12">
+            <a:extLst>
+              <a:ext uri="{FF2B5EF4-FFF2-40B4-BE49-F238E27FC236}">
+                <a16:creationId xmlns:a16="http://schemas.microsoft.com/office/drawing/2014/main" id="{A4056F16-7DF2-C97A-6403-6C96D4808F18}"/>
+              </a:ext>
+            </a:extLst>
+          </p:cNvPr>
+          <p:cNvGrpSpPr/>
+          <p:nvPr/>
+        </p:nvGrpSpPr>
+        <p:grpSpPr>
+          <a:xfrm>
+            <a:off x="662152" y="810358"/>
+            <a:ext cx="9543394" cy="1384995"/>
+            <a:chOff x="662152" y="2167589"/>
+            <a:chExt cx="9543394" cy="1384995"/>
+          </a:xfrm>
+        </p:grpSpPr>
+        <p:sp>
+          <p:nvSpPr>
+            <p:cNvPr id="2" name="Rectangle 1">
+              <a:extLst>
+                <a:ext uri="{FF2B5EF4-FFF2-40B4-BE49-F238E27FC236}">
+                  <a16:creationId xmlns:a16="http://schemas.microsoft.com/office/drawing/2014/main" id="{0A3E5002-7B6B-E02E-628E-90D766B6B000}"/>
+                </a:ext>
+              </a:extLst>
+            </p:cNvPr>
+            <p:cNvSpPr/>
+            <p:nvPr/>
+          </p:nvSpPr>
+          <p:spPr>
+            <a:xfrm>
+              <a:off x="3815255" y="2229466"/>
+              <a:ext cx="2469931" cy="1261241"/>
+            </a:xfrm>
+            <a:prstGeom prst="rect">
+              <a:avLst/>
+            </a:prstGeom>
+            <a:ln w="38100">
+              <a:solidFill>
+                <a:schemeClr val="tx1"/>
+              </a:solidFill>
+            </a:ln>
+          </p:spPr>
+          <p:style>
+            <a:lnRef idx="2">
+              <a:schemeClr val="accent6"/>
+            </a:lnRef>
+            <a:fillRef idx="1">
+              <a:schemeClr val="lt1"/>
+            </a:fillRef>
+            <a:effectRef idx="0">
+              <a:schemeClr val="accent6"/>
+            </a:effectRef>
+            <a:fontRef idx="minor">
+              <a:schemeClr val="dk1"/>
+            </a:fontRef>
+          </p:style>
+          <p:txBody>
+            <a:bodyPr rtlCol="0" anchor="ctr"/>
+            <a:lstStyle/>
+            <a:p>
+              <a:pPr algn="ctr"/>
+              <a:r>
+                <a:rPr lang="en-US" sz="3200" dirty="0"/>
+                <a:t>Beach kiosk model </a:t>
+              </a:r>
+            </a:p>
+          </p:txBody>
+        </p:sp>
+        <p:sp>
+          <p:nvSpPr>
+            <p:cNvPr id="3" name="TextBox 2">
+              <a:extLst>
+                <a:ext uri="{FF2B5EF4-FFF2-40B4-BE49-F238E27FC236}">
+                  <a16:creationId xmlns:a16="http://schemas.microsoft.com/office/drawing/2014/main" id="{A01A5C40-7FF4-F412-513F-365DD14DAA63}"/>
+                </a:ext>
+              </a:extLst>
+            </p:cNvPr>
+            <p:cNvSpPr txBox="1"/>
+            <p:nvPr/>
+          </p:nvSpPr>
+          <p:spPr>
+            <a:xfrm>
+              <a:off x="662152" y="2598476"/>
+              <a:ext cx="2102179" cy="523220"/>
+            </a:xfrm>
+            <a:prstGeom prst="rect">
+              <a:avLst/>
+            </a:prstGeom>
+            <a:noFill/>
+          </p:spPr>
+          <p:txBody>
+            <a:bodyPr wrap="none" rtlCol="0">
+              <a:spAutoFit/>
+            </a:bodyPr>
+            <a:lstStyle/>
+            <a:p>
+              <a:r>
+                <a:rPr lang="en-US" sz="2800" dirty="0"/>
+                <a:t>temperature</a:t>
+              </a:r>
+            </a:p>
+          </p:txBody>
+        </p:sp>
+        <p:sp>
+          <p:nvSpPr>
+            <p:cNvPr id="4" name="TextBox 3">
+              <a:extLst>
+                <a:ext uri="{FF2B5EF4-FFF2-40B4-BE49-F238E27FC236}">
+                  <a16:creationId xmlns:a16="http://schemas.microsoft.com/office/drawing/2014/main" id="{2476DD39-9FED-DADF-4379-9DE2E87041E0}"/>
+                </a:ext>
+              </a:extLst>
+            </p:cNvPr>
+            <p:cNvSpPr txBox="1"/>
+            <p:nvPr/>
+          </p:nvSpPr>
+          <p:spPr>
+            <a:xfrm>
+              <a:off x="7578951" y="2167589"/>
+              <a:ext cx="2626595" cy="1384995"/>
+            </a:xfrm>
+            <a:prstGeom prst="rect">
+              <a:avLst/>
+            </a:prstGeom>
+            <a:noFill/>
+          </p:spPr>
+          <p:txBody>
+            <a:bodyPr wrap="square" rtlCol="0">
+              <a:spAutoFit/>
+            </a:bodyPr>
+            <a:lstStyle/>
+            <a:p>
+              <a:r>
+                <a:rPr lang="en-US" sz="2800" dirty="0"/>
+                <a:t>Predicted number of customers</a:t>
+              </a:r>
+            </a:p>
+          </p:txBody>
+        </p:sp>
+        <p:cxnSp>
+          <p:nvCxnSpPr>
+            <p:cNvPr id="6" name="Straight Arrow Connector 5">
+              <a:extLst>
+                <a:ext uri="{FF2B5EF4-FFF2-40B4-BE49-F238E27FC236}">
+                  <a16:creationId xmlns:a16="http://schemas.microsoft.com/office/drawing/2014/main" id="{355BF273-DE9B-E1D6-6672-CA1B546D8C2E}"/>
+                </a:ext>
+              </a:extLst>
+            </p:cNvPr>
+            <p:cNvCxnSpPr>
+              <a:cxnSpLocks/>
+              <a:stCxn id="3" idx="3"/>
+            </p:cNvCxnSpPr>
+            <p:nvPr/>
+          </p:nvCxnSpPr>
+          <p:spPr>
+            <a:xfrm flipV="1">
+              <a:off x="2764331" y="2844698"/>
+              <a:ext cx="1050924" cy="15388"/>
+            </a:xfrm>
+            <a:prstGeom prst="straightConnector1">
+              <a:avLst/>
+            </a:prstGeom>
+            <a:ln w="76200">
+              <a:solidFill>
+                <a:schemeClr val="bg1">
+                  <a:lumMod val="50000"/>
+                </a:schemeClr>
+              </a:solidFill>
+              <a:tailEnd type="triangle"/>
+            </a:ln>
+          </p:spPr>
+          <p:style>
+            <a:lnRef idx="2">
+              <a:schemeClr val="accent1"/>
+            </a:lnRef>
+            <a:fillRef idx="0">
+              <a:schemeClr val="accent1"/>
+            </a:fillRef>
+            <a:effectRef idx="1">
+              <a:schemeClr val="accent1"/>
+            </a:effectRef>
+            <a:fontRef idx="minor">
+              <a:schemeClr val="tx1"/>
+            </a:fontRef>
+          </p:style>
+        </p:cxnSp>
+        <p:cxnSp>
+          <p:nvCxnSpPr>
+            <p:cNvPr id="8" name="Straight Arrow Connector 7">
+              <a:extLst>
+                <a:ext uri="{FF2B5EF4-FFF2-40B4-BE49-F238E27FC236}">
+                  <a16:creationId xmlns:a16="http://schemas.microsoft.com/office/drawing/2014/main" id="{61E6F99B-3A03-6C92-599D-58D7E1685353}"/>
+                </a:ext>
+              </a:extLst>
+            </p:cNvPr>
+            <p:cNvCxnSpPr>
+              <a:cxnSpLocks/>
+            </p:cNvCxnSpPr>
+            <p:nvPr/>
+          </p:nvCxnSpPr>
+          <p:spPr>
+            <a:xfrm flipV="1">
+              <a:off x="6285189" y="2829148"/>
+              <a:ext cx="1241212" cy="30938"/>
+            </a:xfrm>
+            <a:prstGeom prst="straightConnector1">
+              <a:avLst/>
+            </a:prstGeom>
+            <a:ln w="76200">
+              <a:solidFill>
+                <a:schemeClr val="bg1">
+                  <a:lumMod val="50000"/>
+                </a:schemeClr>
+              </a:solidFill>
+              <a:tailEnd type="triangle"/>
+            </a:ln>
+          </p:spPr>
+          <p:style>
+            <a:lnRef idx="2">
+              <a:schemeClr val="accent1"/>
+            </a:lnRef>
+            <a:fillRef idx="0">
+              <a:schemeClr val="accent1"/>
+            </a:fillRef>
+            <a:effectRef idx="1">
+              <a:schemeClr val="accent1"/>
+            </a:effectRef>
+            <a:fontRef idx="minor">
+              <a:schemeClr val="tx1"/>
+            </a:fontRef>
+          </p:style>
+        </p:cxnSp>
+      </p:grpSp>
+      <p:grpSp>
+        <p:nvGrpSpPr>
+          <p:cNvPr id="30" name="Group 29">
+            <a:extLst>
+              <a:ext uri="{FF2B5EF4-FFF2-40B4-BE49-F238E27FC236}">
+                <a16:creationId xmlns:a16="http://schemas.microsoft.com/office/drawing/2014/main" id="{4ABD37B4-9E1F-154D-2392-4C73F07FE41F}"/>
+              </a:ext>
+            </a:extLst>
+          </p:cNvPr>
+          <p:cNvGrpSpPr/>
+          <p:nvPr/>
+        </p:nvGrpSpPr>
+        <p:grpSpPr>
+          <a:xfrm>
+            <a:off x="557048" y="4355514"/>
+            <a:ext cx="10184523" cy="1261241"/>
+            <a:chOff x="1776461" y="4355514"/>
+            <a:chExt cx="7251924" cy="1261241"/>
+          </a:xfrm>
+        </p:grpSpPr>
+        <p:grpSp>
+          <p:nvGrpSpPr>
+            <p:cNvPr id="14" name="Group 13">
+              <a:extLst>
+                <a:ext uri="{FF2B5EF4-FFF2-40B4-BE49-F238E27FC236}">
+                  <a16:creationId xmlns:a16="http://schemas.microsoft.com/office/drawing/2014/main" id="{A66FB24D-9BAD-3928-3B7C-189E29BB25E4}"/>
+                </a:ext>
+              </a:extLst>
+            </p:cNvPr>
+            <p:cNvGrpSpPr/>
+            <p:nvPr/>
+          </p:nvGrpSpPr>
+          <p:grpSpPr>
+            <a:xfrm>
+              <a:off x="2396360" y="4355514"/>
+              <a:ext cx="6632025" cy="1261241"/>
+              <a:chOff x="2532994" y="2229466"/>
+              <a:chExt cx="6632025" cy="1261241"/>
+            </a:xfrm>
+          </p:grpSpPr>
+          <mc:AlternateContent xmlns:mc="http://schemas.openxmlformats.org/markup-compatibility/2006" xmlns:a14="http://schemas.microsoft.com/office/drawing/2010/main">
+            <mc:Choice Requires="a14">
+              <p:sp>
+                <p:nvSpPr>
+                  <p:cNvPr id="15" name="Rectangle 14">
+                    <a:extLst>
+                      <a:ext uri="{FF2B5EF4-FFF2-40B4-BE49-F238E27FC236}">
+                        <a16:creationId xmlns:a16="http://schemas.microsoft.com/office/drawing/2014/main" id="{C7551B2C-1AA9-7E38-DD98-FDAADE8941B1}"/>
+                      </a:ext>
+                    </a:extLst>
+                  </p:cNvPr>
+                  <p:cNvSpPr/>
+                  <p:nvPr/>
+                </p:nvSpPr>
+                <p:spPr>
+                  <a:xfrm>
+                    <a:off x="3815255" y="2229466"/>
+                    <a:ext cx="3079533" cy="1261241"/>
+                  </a:xfrm>
+                  <a:prstGeom prst="rect">
+                    <a:avLst/>
+                  </a:prstGeom>
+                  <a:ln w="38100">
+                    <a:solidFill>
+                      <a:schemeClr val="tx1"/>
+                    </a:solidFill>
+                  </a:ln>
+                </p:spPr>
+                <p:style>
+                  <a:lnRef idx="2">
+                    <a:schemeClr val="accent6"/>
+                  </a:lnRef>
+                  <a:fillRef idx="1">
+                    <a:schemeClr val="lt1"/>
+                  </a:fillRef>
+                  <a:effectRef idx="0">
+                    <a:schemeClr val="accent6"/>
+                  </a:effectRef>
+                  <a:fontRef idx="minor">
+                    <a:schemeClr val="dk1"/>
+                  </a:fontRef>
+                </p:style>
+                <p:txBody>
+                  <a:bodyPr rtlCol="0" anchor="ctr"/>
+                  <a:lstStyle/>
+                  <a:p>
+                    <a:pPr algn="ctr"/>
+                    <a14:m>
+                      <m:oMathPara xmlns:m="http://schemas.openxmlformats.org/officeDocument/2006/math">
+                        <m:oMathParaPr>
+                          <m:jc m:val="centerGroup"/>
+                        </m:oMathParaPr>
+                        <m:oMath xmlns:m="http://schemas.openxmlformats.org/officeDocument/2006/math">
+                          <m:r>
+                            <a:rPr lang="en-US" sz="3200" b="0" i="1" smtClean="0">
+                              <a:latin typeface="Cambria Math" panose="02040503050406030204" pitchFamily="18" charset="0"/>
+                            </a:rPr>
+                            <m:t>15+2∗</m:t>
+                          </m:r>
+                          <m:r>
+                            <a:rPr lang="en-US" sz="3200" b="0" i="1" smtClean="0">
+                              <a:latin typeface="Cambria Math" panose="02040503050406030204" pitchFamily="18" charset="0"/>
+                            </a:rPr>
+                            <m:t>𝑡𝑒𝑚𝑝𝑒𝑟𝑎𝑡𝑢𝑟𝑒</m:t>
+                          </m:r>
+                        </m:oMath>
+                      </m:oMathPara>
+                    </a14:m>
+                    <a:endParaRPr lang="en-US" sz="3200" dirty="0"/>
+                  </a:p>
+                </p:txBody>
+              </p:sp>
+            </mc:Choice>
+            <mc:Fallback xmlns="">
+              <p:sp>
+                <p:nvSpPr>
+                  <p:cNvPr id="15" name="Rectangle 14">
+                    <a:extLst>
+                      <a:ext uri="{FF2B5EF4-FFF2-40B4-BE49-F238E27FC236}">
+                        <a16:creationId xmlns:a16="http://schemas.microsoft.com/office/drawing/2014/main" id="{C7551B2C-1AA9-7E38-DD98-FDAADE8941B1}"/>
+                      </a:ext>
+                    </a:extLst>
+                  </p:cNvPr>
+                  <p:cNvSpPr>
+                    <a:spLocks noRot="1" noChangeAspect="1" noMove="1" noResize="1" noEditPoints="1" noAdjustHandles="1" noChangeArrowheads="1" noChangeShapeType="1" noTextEdit="1"/>
+                  </p:cNvSpPr>
+                  <p:nvPr/>
+                </p:nvSpPr>
+                <p:spPr>
+                  <a:xfrm>
+                    <a:off x="3815255" y="2229466"/>
+                    <a:ext cx="3079533" cy="1261241"/>
+                  </a:xfrm>
+                  <a:prstGeom prst="rect">
+                    <a:avLst/>
+                  </a:prstGeom>
+                  <a:blipFill>
+                    <a:blip r:embed="rId2"/>
+                    <a:stretch>
+                      <a:fillRect/>
+                    </a:stretch>
+                  </a:blipFill>
+                  <a:ln w="38100">
+                    <a:solidFill>
+                      <a:schemeClr val="tx1"/>
+                    </a:solidFill>
+                  </a:ln>
+                </p:spPr>
+                <p:txBody>
+                  <a:bodyPr/>
+                  <a:lstStyle/>
+                  <a:p>
+                    <a:r>
+                      <a:rPr lang="en-US">
+                        <a:noFill/>
+                      </a:rPr>
+                      <a:t> </a:t>
+                    </a:r>
+                  </a:p>
+                </p:txBody>
+              </p:sp>
+            </mc:Fallback>
+          </mc:AlternateContent>
+          <mc:AlternateContent xmlns:mc="http://schemas.openxmlformats.org/markup-compatibility/2006" xmlns:a14="http://schemas.microsoft.com/office/drawing/2010/main">
+            <mc:Choice Requires="a14">
+              <p:sp>
+                <p:nvSpPr>
+                  <p:cNvPr id="17" name="TextBox 16">
+                    <a:extLst>
+                      <a:ext uri="{FF2B5EF4-FFF2-40B4-BE49-F238E27FC236}">
+                        <a16:creationId xmlns:a16="http://schemas.microsoft.com/office/drawing/2014/main" id="{7E5338C1-7C34-0A28-59B0-12735D42A3EF}"/>
+                      </a:ext>
+                    </a:extLst>
+                  </p:cNvPr>
+                  <p:cNvSpPr txBox="1"/>
+                  <p:nvPr/>
+                </p:nvSpPr>
+                <p:spPr>
+                  <a:xfrm>
+                    <a:off x="8177046" y="2503920"/>
+                    <a:ext cx="987973" cy="646331"/>
+                  </a:xfrm>
+                  <a:prstGeom prst="rect">
+                    <a:avLst/>
+                  </a:prstGeom>
+                  <a:noFill/>
+                </p:spPr>
+                <p:txBody>
+                  <a:bodyPr wrap="square" rtlCol="0">
+                    <a:spAutoFit/>
+                  </a:bodyPr>
+                  <a:lstStyle/>
+                  <a:p>
+                    <a:r>
+                      <a:rPr lang="en-US" sz="3600" dirty="0"/>
+                      <a:t>155</a:t>
+                    </a:r>
+                  </a:p>
+                </p:txBody>
+              </p:sp>
+            </mc:Choice>
+            <mc:Fallback xmlns="">
+              <p:sp>
+                <p:nvSpPr>
+                  <p:cNvPr id="17" name="TextBox 16">
+                    <a:extLst>
+                      <a:ext uri="{FF2B5EF4-FFF2-40B4-BE49-F238E27FC236}">
+                        <a16:creationId xmlns:a16="http://schemas.microsoft.com/office/drawing/2014/main" id="{7E5338C1-7C34-0A28-59B0-12735D42A3EF}"/>
+                      </a:ext>
+                    </a:extLst>
+                  </p:cNvPr>
+                  <p:cNvSpPr txBox="1">
+                    <a:spLocks noRot="1" noChangeAspect="1" noMove="1" noResize="1" noEditPoints="1" noAdjustHandles="1" noChangeArrowheads="1" noChangeShapeType="1" noTextEdit="1"/>
+                  </p:cNvSpPr>
+                  <p:nvPr/>
+                </p:nvSpPr>
+                <p:spPr>
+                  <a:xfrm>
+                    <a:off x="8177046" y="2503920"/>
+                    <a:ext cx="987973" cy="646331"/>
+                  </a:xfrm>
+                  <a:prstGeom prst="rect">
+                    <a:avLst/>
+                  </a:prstGeom>
+                  <a:blipFill>
+                    <a:blip r:embed="rId3"/>
+                    <a:stretch>
+                      <a:fillRect l="-19231" t="-15385" r="-21795" b="-32692"/>
+                    </a:stretch>
+                  </a:blipFill>
+                </p:spPr>
+                <p:txBody>
+                  <a:bodyPr/>
+                  <a:lstStyle/>
+                  <a:p>
+                    <a:r>
+                      <a:rPr lang="en-US">
+                        <a:noFill/>
+                      </a:rPr>
+                      <a:t> </a:t>
+                    </a:r>
+                  </a:p>
+                </p:txBody>
+              </p:sp>
+            </mc:Fallback>
+          </mc:AlternateContent>
+          <p:cxnSp>
+            <p:nvCxnSpPr>
+              <p:cNvPr id="18" name="Straight Arrow Connector 17">
+                <a:extLst>
+                  <a:ext uri="{FF2B5EF4-FFF2-40B4-BE49-F238E27FC236}">
+                    <a16:creationId xmlns:a16="http://schemas.microsoft.com/office/drawing/2014/main" id="{137A6BC3-E0E3-B011-335E-EBAA4F3640DA}"/>
+                  </a:ext>
+                </a:extLst>
+              </p:cNvPr>
+              <p:cNvCxnSpPr>
+                <a:cxnSpLocks/>
+              </p:cNvCxnSpPr>
+              <p:nvPr/>
+            </p:nvCxnSpPr>
+            <p:spPr>
+              <a:xfrm flipV="1">
+                <a:off x="2532994" y="2844698"/>
+                <a:ext cx="1282261" cy="6916"/>
+              </a:xfrm>
+              <a:prstGeom prst="straightConnector1">
+                <a:avLst/>
+              </a:prstGeom>
+              <a:ln w="76200">
+                <a:solidFill>
+                  <a:schemeClr val="bg1">
+                    <a:lumMod val="50000"/>
+                  </a:schemeClr>
+                </a:solidFill>
+                <a:tailEnd type="triangle"/>
+              </a:ln>
+            </p:spPr>
+            <p:style>
+              <a:lnRef idx="2">
+                <a:schemeClr val="accent1"/>
+              </a:lnRef>
+              <a:fillRef idx="0">
+                <a:schemeClr val="accent1"/>
+              </a:fillRef>
+              <a:effectRef idx="1">
+                <a:schemeClr val="accent1"/>
+              </a:effectRef>
+              <a:fontRef idx="minor">
+                <a:schemeClr val="tx1"/>
+              </a:fontRef>
+            </p:style>
+          </p:cxnSp>
+          <p:cxnSp>
+            <p:nvCxnSpPr>
+              <p:cNvPr id="19" name="Straight Arrow Connector 18">
+                <a:extLst>
+                  <a:ext uri="{FF2B5EF4-FFF2-40B4-BE49-F238E27FC236}">
+                    <a16:creationId xmlns:a16="http://schemas.microsoft.com/office/drawing/2014/main" id="{EC6C8ADA-CD46-4F26-1D94-A2F0E9576103}"/>
+                  </a:ext>
+                </a:extLst>
+              </p:cNvPr>
+              <p:cNvCxnSpPr>
+                <a:cxnSpLocks/>
+              </p:cNvCxnSpPr>
+              <p:nvPr/>
+            </p:nvCxnSpPr>
+            <p:spPr>
+              <a:xfrm flipV="1">
+                <a:off x="6894788" y="2829148"/>
+                <a:ext cx="1241212" cy="30938"/>
+              </a:xfrm>
+              <a:prstGeom prst="straightConnector1">
+                <a:avLst/>
+              </a:prstGeom>
+              <a:ln w="76200">
+                <a:solidFill>
+                  <a:schemeClr val="bg1">
+                    <a:lumMod val="50000"/>
+                  </a:schemeClr>
+                </a:solidFill>
+                <a:tailEnd type="triangle"/>
+              </a:ln>
+            </p:spPr>
+            <p:style>
+              <a:lnRef idx="2">
+                <a:schemeClr val="accent1"/>
+              </a:lnRef>
+              <a:fillRef idx="0">
+                <a:schemeClr val="accent1"/>
+              </a:fillRef>
+              <a:effectRef idx="1">
+                <a:schemeClr val="accent1"/>
+              </a:effectRef>
+              <a:fontRef idx="minor">
+                <a:schemeClr val="tx1"/>
+              </a:fontRef>
+            </p:style>
+          </p:cxnSp>
+        </p:grpSp>
+        <mc:AlternateContent xmlns:mc="http://schemas.openxmlformats.org/markup-compatibility/2006" xmlns:a14="http://schemas.microsoft.com/office/drawing/2010/main">
+          <mc:Choice Requires="a14">
+            <p:sp>
+              <p:nvSpPr>
+                <p:cNvPr id="21" name="TextBox 20">
+                  <a:extLst>
+                    <a:ext uri="{FF2B5EF4-FFF2-40B4-BE49-F238E27FC236}">
+                      <a16:creationId xmlns:a16="http://schemas.microsoft.com/office/drawing/2014/main" id="{2894E016-1DED-8934-5200-E9E093A7E0BC}"/>
+                    </a:ext>
+                  </a:extLst>
+                </p:cNvPr>
+                <p:cNvSpPr txBox="1"/>
+                <p:nvPr/>
+              </p:nvSpPr>
+              <p:spPr>
+                <a:xfrm>
+                  <a:off x="1776461" y="4668998"/>
+                  <a:ext cx="604333" cy="553998"/>
+                </a:xfrm>
+                <a:prstGeom prst="rect">
+                  <a:avLst/>
+                </a:prstGeom>
+                <a:noFill/>
+              </p:spPr>
+              <p:txBody>
+                <a:bodyPr wrap="none" lIns="0" tIns="0" rIns="0" bIns="0" rtlCol="0">
+                  <a:spAutoFit/>
+                </a:bodyPr>
+                <a:lstStyle/>
+                <a:p>
+                  <a:pPr/>
+                  <a14:m>
+                    <m:oMathPara xmlns:m="http://schemas.openxmlformats.org/officeDocument/2006/math">
+                      <m:oMathParaPr>
+                        <m:jc m:val="centerGroup"/>
+                      </m:oMathParaPr>
+                      <m:oMath xmlns:m="http://schemas.openxmlformats.org/officeDocument/2006/math">
+                        <m:r>
+                          <a:rPr lang="en-US" sz="3600" b="0" i="1" smtClean="0">
+                            <a:latin typeface="Cambria Math" panose="02040503050406030204" pitchFamily="18" charset="0"/>
+                          </a:rPr>
+                          <m:t>70</m:t>
+                        </m:r>
+                      </m:oMath>
+                    </m:oMathPara>
+                  </a14:m>
+                  <a:endParaRPr lang="en-US" sz="3600" dirty="0"/>
+                </a:p>
+              </p:txBody>
+            </p:sp>
+          </mc:Choice>
+          <mc:Fallback xmlns="">
+            <p:sp>
+              <p:nvSpPr>
+                <p:cNvPr id="21" name="TextBox 20">
+                  <a:extLst>
+                    <a:ext uri="{FF2B5EF4-FFF2-40B4-BE49-F238E27FC236}">
+                      <a16:creationId xmlns:a16="http://schemas.microsoft.com/office/drawing/2014/main" id="{2894E016-1DED-8934-5200-E9E093A7E0BC}"/>
+                    </a:ext>
+                  </a:extLst>
+                </p:cNvPr>
+                <p:cNvSpPr txBox="1">
+                  <a:spLocks noRot="1" noChangeAspect="1" noMove="1" noResize="1" noEditPoints="1" noAdjustHandles="1" noChangeArrowheads="1" noChangeShapeType="1" noTextEdit="1"/>
+                </p:cNvSpPr>
+                <p:nvPr/>
+              </p:nvSpPr>
+              <p:spPr>
+                <a:xfrm>
+                  <a:off x="1776461" y="4668998"/>
+                  <a:ext cx="604333" cy="553998"/>
+                </a:xfrm>
+                <a:prstGeom prst="rect">
+                  <a:avLst/>
+                </a:prstGeom>
+                <a:blipFill>
+                  <a:blip r:embed="rId4"/>
+                  <a:stretch>
+                    <a:fillRect l="-16327" r="-16327" b="-2222"/>
+                  </a:stretch>
+                </a:blipFill>
+              </p:spPr>
+              <p:txBody>
+                <a:bodyPr/>
+                <a:lstStyle/>
+                <a:p>
+                  <a:r>
+                    <a:rPr lang="en-US">
+                      <a:noFill/>
+                    </a:rPr>
+                    <a:t> </a:t>
+                  </a:r>
+                </a:p>
+              </p:txBody>
+            </p:sp>
+          </mc:Fallback>
+        </mc:AlternateContent>
+      </p:grpSp>
+      <p:grpSp>
+        <p:nvGrpSpPr>
+          <p:cNvPr id="28" name="Group 27">
+            <a:extLst>
+              <a:ext uri="{FF2B5EF4-FFF2-40B4-BE49-F238E27FC236}">
+                <a16:creationId xmlns:a16="http://schemas.microsoft.com/office/drawing/2014/main" id="{E6131264-CD0A-08D7-1D35-652C809C006B}"/>
+              </a:ext>
+            </a:extLst>
+          </p:cNvPr>
+          <p:cNvGrpSpPr/>
+          <p:nvPr/>
+        </p:nvGrpSpPr>
+        <p:grpSpPr>
+          <a:xfrm>
+            <a:off x="115614" y="2441576"/>
+            <a:ext cx="11951179" cy="1478122"/>
+            <a:chOff x="-499301" y="2658456"/>
+            <a:chExt cx="11869037" cy="1261241"/>
+          </a:xfrm>
+        </p:grpSpPr>
+        <p:grpSp>
+          <p:nvGrpSpPr>
+            <p:cNvPr id="22" name="Group 21">
+              <a:extLst>
+                <a:ext uri="{FF2B5EF4-FFF2-40B4-BE49-F238E27FC236}">
+                  <a16:creationId xmlns:a16="http://schemas.microsoft.com/office/drawing/2014/main" id="{F47366C1-EC5E-12C4-D6B9-22B078CF8813}"/>
+                </a:ext>
+              </a:extLst>
+            </p:cNvPr>
+            <p:cNvGrpSpPr/>
+            <p:nvPr/>
+          </p:nvGrpSpPr>
+          <p:grpSpPr>
+            <a:xfrm>
+              <a:off x="2296511" y="2658456"/>
+              <a:ext cx="9073225" cy="1261241"/>
+              <a:chOff x="2532994" y="2229466"/>
+              <a:chExt cx="9073225" cy="1261241"/>
+            </a:xfrm>
+          </p:grpSpPr>
+          <mc:AlternateContent xmlns:mc="http://schemas.openxmlformats.org/markup-compatibility/2006" xmlns:a14="http://schemas.microsoft.com/office/drawing/2010/main">
+            <mc:Choice Requires="a14">
+              <p:sp>
+                <p:nvSpPr>
+                  <p:cNvPr id="23" name="Rectangle 22">
+                    <a:extLst>
+                      <a:ext uri="{FF2B5EF4-FFF2-40B4-BE49-F238E27FC236}">
+                        <a16:creationId xmlns:a16="http://schemas.microsoft.com/office/drawing/2014/main" id="{108CA430-570E-D900-4294-58E99DC0CA5F}"/>
+                      </a:ext>
+                    </a:extLst>
+                  </p:cNvPr>
+                  <p:cNvSpPr/>
+                  <p:nvPr/>
+                </p:nvSpPr>
+                <p:spPr>
+                  <a:xfrm>
+                    <a:off x="3815255" y="2229466"/>
+                    <a:ext cx="4047349" cy="1261241"/>
+                  </a:xfrm>
+                  <a:prstGeom prst="rect">
+                    <a:avLst/>
+                  </a:prstGeom>
+                  <a:ln w="38100">
+                    <a:solidFill>
+                      <a:schemeClr val="tx1"/>
+                    </a:solidFill>
+                  </a:ln>
+                </p:spPr>
+                <p:style>
+                  <a:lnRef idx="2">
+                    <a:schemeClr val="accent6"/>
+                  </a:lnRef>
+                  <a:fillRef idx="1">
+                    <a:schemeClr val="lt1"/>
+                  </a:fillRef>
+                  <a:effectRef idx="0">
+                    <a:schemeClr val="accent6"/>
+                  </a:effectRef>
+                  <a:fontRef idx="minor">
+                    <a:schemeClr val="dk1"/>
+                  </a:fontRef>
+                </p:style>
+                <p:txBody>
+                  <a:bodyPr rtlCol="0" anchor="ctr"/>
+                  <a:lstStyle/>
+                  <a:p>
+                    <a:pPr algn="ctr"/>
+                    <a14:m>
+                      <m:oMathPara xmlns:m="http://schemas.openxmlformats.org/officeDocument/2006/math">
+                        <m:oMathParaPr>
+                          <m:jc m:val="centerGroup"/>
+                        </m:oMathParaPr>
+                        <m:oMath xmlns:m="http://schemas.openxmlformats.org/officeDocument/2006/math">
+                          <m:r>
+                            <a:rPr lang="en-US" sz="3200" b="0" i="1" smtClean="0">
+                              <a:latin typeface="Cambria Math" panose="02040503050406030204" pitchFamily="18" charset="0"/>
+                            </a:rPr>
+                            <m:t>𝑎</m:t>
+                          </m:r>
+                          <m:r>
+                            <a:rPr lang="en-US" sz="3200" b="0" i="1" smtClean="0">
+                              <a:latin typeface="Cambria Math" panose="02040503050406030204" pitchFamily="18" charset="0"/>
+                            </a:rPr>
+                            <m:t>+</m:t>
+                          </m:r>
+                          <m:r>
+                            <a:rPr lang="en-US" sz="3200" b="0" i="1" smtClean="0">
+                              <a:latin typeface="Cambria Math" panose="02040503050406030204" pitchFamily="18" charset="0"/>
+                            </a:rPr>
+                            <m:t>𝑏</m:t>
+                          </m:r>
+                          <m:r>
+                            <a:rPr lang="en-US" sz="3200" b="0" i="1" smtClean="0">
+                              <a:latin typeface="Cambria Math" panose="02040503050406030204" pitchFamily="18" charset="0"/>
+                            </a:rPr>
+                            <m:t>∗</m:t>
+                          </m:r>
+                          <m:r>
+                            <a:rPr lang="en-US" sz="3200" b="0" i="1" smtClean="0">
+                              <a:latin typeface="Cambria Math" panose="02040503050406030204" pitchFamily="18" charset="0"/>
+                            </a:rPr>
+                            <m:t>𝑡𝑒𝑚𝑝𝑒𝑟𝑎𝑡𝑢𝑟𝑒</m:t>
+                          </m:r>
+                        </m:oMath>
+                      </m:oMathPara>
+                    </a14:m>
+                    <a:endParaRPr lang="en-US" sz="3200" dirty="0"/>
+                  </a:p>
+                </p:txBody>
+              </p:sp>
+            </mc:Choice>
+            <mc:Fallback xmlns="">
+              <p:sp>
+                <p:nvSpPr>
+                  <p:cNvPr id="23" name="Rectangle 22">
+                    <a:extLst>
+                      <a:ext uri="{FF2B5EF4-FFF2-40B4-BE49-F238E27FC236}">
+                        <a16:creationId xmlns:a16="http://schemas.microsoft.com/office/drawing/2014/main" id="{108CA430-570E-D900-4294-58E99DC0CA5F}"/>
+                      </a:ext>
+                    </a:extLst>
+                  </p:cNvPr>
+                  <p:cNvSpPr>
+                    <a:spLocks noRot="1" noChangeAspect="1" noMove="1" noResize="1" noEditPoints="1" noAdjustHandles="1" noChangeArrowheads="1" noChangeShapeType="1" noTextEdit="1"/>
+                  </p:cNvSpPr>
+                  <p:nvPr/>
+                </p:nvSpPr>
+                <p:spPr>
+                  <a:xfrm>
+                    <a:off x="3815255" y="2229466"/>
+                    <a:ext cx="4047349" cy="1261241"/>
+                  </a:xfrm>
+                  <a:prstGeom prst="rect">
+                    <a:avLst/>
+                  </a:prstGeom>
+                  <a:blipFill>
+                    <a:blip r:embed="rId5"/>
+                    <a:stretch>
+                      <a:fillRect/>
+                    </a:stretch>
+                  </a:blipFill>
+                  <a:ln w="38100">
+                    <a:solidFill>
+                      <a:schemeClr val="tx1"/>
+                    </a:solidFill>
+                  </a:ln>
+                </p:spPr>
+                <p:txBody>
+                  <a:bodyPr/>
+                  <a:lstStyle/>
+                  <a:p>
+                    <a:r>
+                      <a:rPr lang="en-US">
+                        <a:noFill/>
+                      </a:rPr>
+                      <a:t> </a:t>
+                    </a:r>
+                  </a:p>
+                </p:txBody>
+              </p:sp>
+            </mc:Fallback>
+          </mc:AlternateContent>
+          <mc:AlternateContent xmlns:mc="http://schemas.openxmlformats.org/markup-compatibility/2006" xmlns:a14="http://schemas.microsoft.com/office/drawing/2010/main">
+            <mc:Choice Requires="a14">
+              <p:sp>
+                <p:nvSpPr>
+                  <p:cNvPr id="24" name="TextBox 23">
+                    <a:extLst>
+                      <a:ext uri="{FF2B5EF4-FFF2-40B4-BE49-F238E27FC236}">
+                        <a16:creationId xmlns:a16="http://schemas.microsoft.com/office/drawing/2014/main" id="{AF17F315-0772-B4CF-DECC-8C2B4727AFF6}"/>
+                      </a:ext>
+                    </a:extLst>
+                  </p:cNvPr>
+                  <p:cNvSpPr txBox="1"/>
+                  <p:nvPr/>
+                </p:nvSpPr>
+                <p:spPr>
+                  <a:xfrm>
+                    <a:off x="9207058" y="2503920"/>
+                    <a:ext cx="2399161" cy="646331"/>
+                  </a:xfrm>
+                  <a:prstGeom prst="rect">
+                    <a:avLst/>
+                  </a:prstGeom>
+                  <a:noFill/>
+                </p:spPr>
+                <p:txBody>
+                  <a:bodyPr wrap="square" rtlCol="0">
+                    <a:spAutoFit/>
+                  </a:bodyPr>
+                  <a:lstStyle/>
+                  <a:p>
+                    <a:pPr/>
+                    <a14:m>
+                      <m:oMathPara xmlns:m="http://schemas.openxmlformats.org/officeDocument/2006/math">
+                        <m:oMathParaPr>
+                          <m:jc m:val="centerGroup"/>
+                        </m:oMathParaPr>
+                        <m:oMath xmlns:m="http://schemas.openxmlformats.org/officeDocument/2006/math">
+                          <m:acc>
+                            <m:accPr>
+                              <m:chr m:val="̂"/>
+                              <m:ctrlPr>
+                                <a:rPr lang="en-US" sz="3600" i="1" dirty="0" smtClean="0">
+                                  <a:latin typeface="Cambria Math" panose="02040503050406030204" pitchFamily="18" charset="0"/>
+                                </a:rPr>
+                              </m:ctrlPr>
+                            </m:accPr>
+                            <m:e>
+                              <m:r>
+                                <a:rPr lang="en-US" sz="3600" b="0" i="1" dirty="0" smtClean="0">
+                                  <a:latin typeface="Cambria Math" panose="02040503050406030204" pitchFamily="18" charset="0"/>
+                                </a:rPr>
+                                <m:t>𝑐𝑢𝑠𝑡𝑜𝑚𝑒𝑟𝑠</m:t>
+                              </m:r>
+                            </m:e>
+                          </m:acc>
+                        </m:oMath>
+                      </m:oMathPara>
+                    </a14:m>
+                    <a:endParaRPr dirty="0"/>
+                  </a:p>
+                </p:txBody>
+              </p:sp>
+            </mc:Choice>
+            <mc:Fallback xmlns="">
+              <p:sp>
+                <p:nvSpPr>
+                  <p:cNvPr id="24" name="TextBox 23">
+                    <a:extLst>
+                      <a:ext uri="{FF2B5EF4-FFF2-40B4-BE49-F238E27FC236}">
+                        <a16:creationId xmlns:a16="http://schemas.microsoft.com/office/drawing/2014/main" id="{AF17F315-0772-B4CF-DECC-8C2B4727AFF6}"/>
+                      </a:ext>
+                    </a:extLst>
+                  </p:cNvPr>
+                  <p:cNvSpPr txBox="1">
+                    <a:spLocks noRot="1" noChangeAspect="1" noMove="1" noResize="1" noEditPoints="1" noAdjustHandles="1" noChangeArrowheads="1" noChangeShapeType="1" noTextEdit="1"/>
+                  </p:cNvSpPr>
+                  <p:nvPr/>
+                </p:nvSpPr>
+                <p:spPr>
+                  <a:xfrm>
+                    <a:off x="9207058" y="2503920"/>
+                    <a:ext cx="2399161" cy="646331"/>
+                  </a:xfrm>
+                  <a:prstGeom prst="rect">
+                    <a:avLst/>
+                  </a:prstGeom>
+                  <a:blipFill>
+                    <a:blip r:embed="rId6"/>
+                    <a:stretch>
+                      <a:fillRect t="-14754"/>
+                    </a:stretch>
+                  </a:blipFill>
+                </p:spPr>
+                <p:txBody>
+                  <a:bodyPr/>
+                  <a:lstStyle/>
+                  <a:p>
+                    <a:r>
+                      <a:rPr lang="en-US">
+                        <a:noFill/>
+                      </a:rPr>
+                      <a:t> </a:t>
+                    </a:r>
+                  </a:p>
+                </p:txBody>
+              </p:sp>
+            </mc:Fallback>
+          </mc:AlternateContent>
+          <p:cxnSp>
+            <p:nvCxnSpPr>
+              <p:cNvPr id="25" name="Straight Arrow Connector 24">
+                <a:extLst>
+                  <a:ext uri="{FF2B5EF4-FFF2-40B4-BE49-F238E27FC236}">
+                    <a16:creationId xmlns:a16="http://schemas.microsoft.com/office/drawing/2014/main" id="{4D6829DA-4215-60DB-9C36-E4B4EE0E13EA}"/>
+                  </a:ext>
+                </a:extLst>
+              </p:cNvPr>
+              <p:cNvCxnSpPr>
+                <a:cxnSpLocks/>
+              </p:cNvCxnSpPr>
+              <p:nvPr/>
+            </p:nvCxnSpPr>
+            <p:spPr>
+              <a:xfrm flipV="1">
+                <a:off x="2532994" y="2844698"/>
+                <a:ext cx="1282261" cy="6916"/>
+              </a:xfrm>
+              <a:prstGeom prst="straightConnector1">
+                <a:avLst/>
+              </a:prstGeom>
+              <a:ln w="76200">
+                <a:solidFill>
+                  <a:schemeClr val="bg1">
+                    <a:lumMod val="50000"/>
+                  </a:schemeClr>
+                </a:solidFill>
+                <a:tailEnd type="triangle"/>
+              </a:ln>
+            </p:spPr>
+            <p:style>
+              <a:lnRef idx="2">
+                <a:schemeClr val="accent1"/>
+              </a:lnRef>
+              <a:fillRef idx="0">
+                <a:schemeClr val="accent1"/>
+              </a:fillRef>
+              <a:effectRef idx="1">
+                <a:schemeClr val="accent1"/>
+              </a:effectRef>
+              <a:fontRef idx="minor">
+                <a:schemeClr val="tx1"/>
+              </a:fontRef>
+            </p:style>
+          </p:cxnSp>
+          <p:cxnSp>
+            <p:nvCxnSpPr>
+              <p:cNvPr id="26" name="Straight Arrow Connector 25">
+                <a:extLst>
+                  <a:ext uri="{FF2B5EF4-FFF2-40B4-BE49-F238E27FC236}">
+                    <a16:creationId xmlns:a16="http://schemas.microsoft.com/office/drawing/2014/main" id="{EDA9B41D-7F01-8B25-E5B3-51477B0EDB78}"/>
+                  </a:ext>
+                </a:extLst>
+              </p:cNvPr>
+              <p:cNvCxnSpPr>
+                <a:cxnSpLocks/>
+              </p:cNvCxnSpPr>
+              <p:nvPr/>
+            </p:nvCxnSpPr>
+            <p:spPr>
+              <a:xfrm flipV="1">
+                <a:off x="7861738" y="2829148"/>
+                <a:ext cx="1241212" cy="30938"/>
+              </a:xfrm>
+              <a:prstGeom prst="straightConnector1">
+                <a:avLst/>
+              </a:prstGeom>
+              <a:ln w="76200">
+                <a:solidFill>
+                  <a:schemeClr val="bg1">
+                    <a:lumMod val="50000"/>
+                  </a:schemeClr>
+                </a:solidFill>
+                <a:tailEnd type="triangle"/>
+              </a:ln>
+            </p:spPr>
+            <p:style>
+              <a:lnRef idx="2">
+                <a:schemeClr val="accent1"/>
+              </a:lnRef>
+              <a:fillRef idx="0">
+                <a:schemeClr val="accent1"/>
+              </a:fillRef>
+              <a:effectRef idx="1">
+                <a:schemeClr val="accent1"/>
+              </a:effectRef>
+              <a:fontRef idx="minor">
+                <a:schemeClr val="tx1"/>
+              </a:fontRef>
+            </p:style>
+          </p:cxnSp>
+        </p:grpSp>
+        <mc:AlternateContent xmlns:mc="http://schemas.openxmlformats.org/markup-compatibility/2006" xmlns:a14="http://schemas.microsoft.com/office/drawing/2010/main">
+          <mc:Choice Requires="a14">
+            <p:sp>
+              <p:nvSpPr>
+                <p:cNvPr id="27" name="TextBox 26">
+                  <a:extLst>
+                    <a:ext uri="{FF2B5EF4-FFF2-40B4-BE49-F238E27FC236}">
+                      <a16:creationId xmlns:a16="http://schemas.microsoft.com/office/drawing/2014/main" id="{7F07CC57-8E13-7016-C90F-02EBF5249DB9}"/>
+                    </a:ext>
+                  </a:extLst>
+                </p:cNvPr>
+                <p:cNvSpPr txBox="1"/>
+                <p:nvPr/>
+              </p:nvSpPr>
+              <p:spPr>
+                <a:xfrm>
+                  <a:off x="-499301" y="2971940"/>
+                  <a:ext cx="2762488" cy="553998"/>
+                </a:xfrm>
+                <a:prstGeom prst="rect">
+                  <a:avLst/>
+                </a:prstGeom>
+                <a:noFill/>
+              </p:spPr>
+              <p:txBody>
+                <a:bodyPr wrap="none" lIns="0" tIns="0" rIns="0" bIns="0" rtlCol="0">
+                  <a:spAutoFit/>
+                </a:bodyPr>
+                <a:lstStyle/>
+                <a:p>
+                  <a:pPr/>
+                  <a14:m>
+                    <m:oMathPara xmlns:m="http://schemas.openxmlformats.org/officeDocument/2006/math">
+                      <m:oMathParaPr>
+                        <m:jc m:val="centerGroup"/>
+                      </m:oMathParaPr>
+                      <m:oMath xmlns:m="http://schemas.openxmlformats.org/officeDocument/2006/math">
+                        <m:r>
+                          <a:rPr lang="en-US" sz="3600" b="0" i="1" smtClean="0">
+                            <a:latin typeface="Cambria Math" panose="02040503050406030204" pitchFamily="18" charset="0"/>
+                          </a:rPr>
+                          <m:t>𝑡𝑒𝑚𝑝𝑒𝑟𝑎𝑡𝑢𝑟𝑒</m:t>
+                        </m:r>
+                      </m:oMath>
+                    </m:oMathPara>
+                  </a14:m>
+                  <a:endParaRPr lang="en-US" sz="3600" dirty="0"/>
+                </a:p>
+              </p:txBody>
+            </p:sp>
+          </mc:Choice>
+          <mc:Fallback xmlns="">
+            <p:sp>
+              <p:nvSpPr>
+                <p:cNvPr id="27" name="TextBox 26">
+                  <a:extLst>
+                    <a:ext uri="{FF2B5EF4-FFF2-40B4-BE49-F238E27FC236}">
+                      <a16:creationId xmlns:a16="http://schemas.microsoft.com/office/drawing/2014/main" id="{7F07CC57-8E13-7016-C90F-02EBF5249DB9}"/>
+                    </a:ext>
+                  </a:extLst>
+                </p:cNvPr>
+                <p:cNvSpPr txBox="1">
+                  <a:spLocks noRot="1" noChangeAspect="1" noMove="1" noResize="1" noEditPoints="1" noAdjustHandles="1" noChangeArrowheads="1" noChangeShapeType="1" noTextEdit="1"/>
+                </p:cNvSpPr>
+                <p:nvPr/>
+              </p:nvSpPr>
+              <p:spPr>
+                <a:xfrm>
+                  <a:off x="-499301" y="2971940"/>
+                  <a:ext cx="2762488" cy="553998"/>
+                </a:xfrm>
+                <a:prstGeom prst="rect">
+                  <a:avLst/>
+                </a:prstGeom>
+                <a:blipFill>
+                  <a:blip r:embed="rId7"/>
+                  <a:stretch>
+                    <a:fillRect l="-4566" r="-4110" b="-27273"/>
+                  </a:stretch>
+                </a:blipFill>
+              </p:spPr>
+              <p:txBody>
+                <a:bodyPr/>
+                <a:lstStyle/>
+                <a:p>
+                  <a:r>
+                    <a:rPr lang="en-US">
+                      <a:noFill/>
+                    </a:rPr>
+                    <a:t> </a:t>
+                  </a:r>
+                </a:p>
+              </p:txBody>
+            </p:sp>
+          </mc:Fallback>
+        </mc:AlternateContent>
+      </p:grpSp>
+    </p:spTree>
+    <p:extLst>
+      <p:ext uri="{BB962C8B-B14F-4D97-AF65-F5344CB8AC3E}">
+        <p14:creationId xmlns:p14="http://schemas.microsoft.com/office/powerpoint/2010/main" val="911215209"/>
+      </p:ext>
+    </p:extLst>
+  </p:cSld>
+  <p:clrMapOvr>
+    <a:masterClrMapping/>
+  </p:clrMapOvr>
+</p:sld>
+</file>
+
+<file path=ppt/slides/slide11.xml><?xml version="1.0" encoding="utf-8"?>
+<p:sld xmlns:a="http://schemas.openxmlformats.org/drawingml/2006/main" xmlns:r="http://schemas.openxmlformats.org/officeDocument/2006/relationships" xmlns:p="http://schemas.openxmlformats.org/presentationml/2006/main">
+  <p:cSld>
+    <p:spTree>
+      <p:nvGrpSpPr>
+        <p:cNvPr id="1" name=""/>
+        <p:cNvGrpSpPr/>
+        <p:nvPr/>
+      </p:nvGrpSpPr>
+      <p:grpSpPr>
+        <a:xfrm>
+          <a:off x="0" y="0"/>
+          <a:ext cx="0" cy="0"/>
+          <a:chOff x="0" y="0"/>
+          <a:chExt cx="0" cy="0"/>
+        </a:xfrm>
+      </p:grpSpPr>
+      <p:pic>
+        <p:nvPicPr>
+          <p:cNvPr id="5" name="Picture 4" descr="A white background with black text&#10;&#10;AI-generated content may be incorrect.">
+            <a:extLst>
+              <a:ext uri="{FF2B5EF4-FFF2-40B4-BE49-F238E27FC236}">
+                <a16:creationId xmlns:a16="http://schemas.microsoft.com/office/drawing/2014/main" id="{DE867D86-D6A9-27B6-ECB6-4CFB81670512}"/>
+              </a:ext>
+            </a:extLst>
+          </p:cNvPr>
+          <p:cNvPicPr>
+            <a:picLocks noChangeAspect="1"/>
+          </p:cNvPicPr>
+          <p:nvPr/>
+        </p:nvPicPr>
+        <p:blipFill>
+          <a:blip r:embed="rId2"/>
+          <a:stretch>
+            <a:fillRect/>
+          </a:stretch>
+        </p:blipFill>
+        <p:spPr>
+          <a:xfrm>
+            <a:off x="1809173" y="3429000"/>
+            <a:ext cx="7772400" cy="981776"/>
+          </a:xfrm>
+          <a:prstGeom prst="rect">
+            <a:avLst/>
+          </a:prstGeom>
+        </p:spPr>
+      </p:pic>
+      <p:pic>
+        <p:nvPicPr>
+          <p:cNvPr id="7" name="Picture 6" descr="A black text on a white background&#10;&#10;AI-generated content may be incorrect.">
+            <a:extLst>
+              <a:ext uri="{FF2B5EF4-FFF2-40B4-BE49-F238E27FC236}">
+                <a16:creationId xmlns:a16="http://schemas.microsoft.com/office/drawing/2014/main" id="{B8B7AC29-D6D6-BE9B-3DAE-E85BD4B336A6}"/>
+              </a:ext>
+            </a:extLst>
+          </p:cNvPr>
+          <p:cNvPicPr>
+            <a:picLocks noChangeAspect="1"/>
+          </p:cNvPicPr>
+          <p:nvPr/>
+        </p:nvPicPr>
+        <p:blipFill>
+          <a:blip r:embed="rId3"/>
+          <a:stretch>
+            <a:fillRect/>
+          </a:stretch>
+        </p:blipFill>
+        <p:spPr>
+          <a:xfrm>
+            <a:off x="1654464" y="1160319"/>
+            <a:ext cx="7772400" cy="988509"/>
+          </a:xfrm>
+          <a:prstGeom prst="rect">
+            <a:avLst/>
+          </a:prstGeom>
+        </p:spPr>
+      </p:pic>
+    </p:spTree>
+    <p:extLst>
+      <p:ext uri="{BB962C8B-B14F-4D97-AF65-F5344CB8AC3E}">
+        <p14:creationId xmlns:p14="http://schemas.microsoft.com/office/powerpoint/2010/main" val="2055721291"/>
+      </p:ext>
+    </p:extLst>
+  </p:cSld>
+  <p:clrMapOvr>
+    <a:masterClrMapping/>
+  </p:clrMapOvr>
+</p:sld>
+</file>
+
+<file path=ppt/slides/slide12.xml><?xml version="1.0" encoding="utf-8"?>
+<p:sld xmlns:a="http://schemas.openxmlformats.org/drawingml/2006/main" xmlns:r="http://schemas.openxmlformats.org/officeDocument/2006/relationships" xmlns:p="http://schemas.openxmlformats.org/presentationml/2006/main">
+  <p:cSld>
+    <p:spTree>
+      <p:nvGrpSpPr>
+        <p:cNvPr id="1" name=""/>
+        <p:cNvGrpSpPr/>
+        <p:nvPr/>
+      </p:nvGrpSpPr>
+      <p:grpSpPr>
+        <a:xfrm>
+          <a:off x="0" y="0"/>
+          <a:ext cx="0" cy="0"/>
+          <a:chOff x="0" y="0"/>
+          <a:chExt cx="0" cy="0"/>
+        </a:xfrm>
+      </p:grpSpPr>
+      <p:grpSp>
+        <p:nvGrpSpPr>
+          <p:cNvPr id="8" name="Group 7">
+            <a:extLst>
+              <a:ext uri="{FF2B5EF4-FFF2-40B4-BE49-F238E27FC236}">
+                <a16:creationId xmlns:a16="http://schemas.microsoft.com/office/drawing/2014/main" id="{73BA78C6-0A1C-4CB9-96AB-A54F44A6E764}"/>
+              </a:ext>
+            </a:extLst>
+          </p:cNvPr>
+          <p:cNvGrpSpPr/>
+          <p:nvPr/>
+        </p:nvGrpSpPr>
+        <p:grpSpPr>
+          <a:xfrm>
+            <a:off x="1680209" y="2446504"/>
+            <a:ext cx="7251924" cy="1261241"/>
+            <a:chOff x="1680209" y="2446504"/>
+            <a:chExt cx="7251924" cy="1261241"/>
+          </a:xfrm>
+        </p:grpSpPr>
+        <p:grpSp>
+          <p:nvGrpSpPr>
+            <p:cNvPr id="2" name="Group 1">
+              <a:extLst>
+                <a:ext uri="{FF2B5EF4-FFF2-40B4-BE49-F238E27FC236}">
+                  <a16:creationId xmlns:a16="http://schemas.microsoft.com/office/drawing/2014/main" id="{4CBF2273-C976-0C60-837B-46E1628716EE}"/>
+                </a:ext>
+              </a:extLst>
+            </p:cNvPr>
+            <p:cNvGrpSpPr/>
+            <p:nvPr/>
+          </p:nvGrpSpPr>
+          <p:grpSpPr>
+            <a:xfrm>
+              <a:off x="2300108" y="2446504"/>
+              <a:ext cx="6632025" cy="1261241"/>
+              <a:chOff x="2532994" y="2229466"/>
+              <a:chExt cx="6632025" cy="1261241"/>
+            </a:xfrm>
+          </p:grpSpPr>
+          <mc:AlternateContent xmlns:mc="http://schemas.openxmlformats.org/markup-compatibility/2006" xmlns:a14="http://schemas.microsoft.com/office/drawing/2010/main">
+            <mc:Choice Requires="a14">
+              <p:sp>
+                <p:nvSpPr>
+                  <p:cNvPr id="3" name="Rectangle 2">
+                    <a:extLst>
+                      <a:ext uri="{FF2B5EF4-FFF2-40B4-BE49-F238E27FC236}">
+                        <a16:creationId xmlns:a16="http://schemas.microsoft.com/office/drawing/2014/main" id="{084818F6-C7C0-5DF1-F745-47E963919782}"/>
+                      </a:ext>
+                    </a:extLst>
+                  </p:cNvPr>
+                  <p:cNvSpPr/>
+                  <p:nvPr/>
+                </p:nvSpPr>
+                <p:spPr>
+                  <a:xfrm>
+                    <a:off x="3815255" y="2229466"/>
+                    <a:ext cx="3079533" cy="1261241"/>
+                  </a:xfrm>
+                  <a:prstGeom prst="rect">
+                    <a:avLst/>
+                  </a:prstGeom>
+                  <a:ln w="38100">
+                    <a:solidFill>
+                      <a:schemeClr val="tx1"/>
+                    </a:solidFill>
+                  </a:ln>
+                </p:spPr>
+                <p:style>
+                  <a:lnRef idx="2">
+                    <a:schemeClr val="accent6"/>
+                  </a:lnRef>
+                  <a:fillRef idx="1">
+                    <a:schemeClr val="lt1"/>
+                  </a:fillRef>
+                  <a:effectRef idx="0">
+                    <a:schemeClr val="accent6"/>
+                  </a:effectRef>
+                  <a:fontRef idx="minor">
+                    <a:schemeClr val="dk1"/>
+                  </a:fontRef>
+                </p:style>
+                <p:txBody>
+                  <a:bodyPr rtlCol="0" anchor="ctr"/>
+                  <a:lstStyle/>
+                  <a:p>
+                    <a:pPr algn="ctr"/>
+                    <a14:m>
+                      <m:oMathPara xmlns:m="http://schemas.openxmlformats.org/officeDocument/2006/math">
+                        <m:oMathParaPr>
+                          <m:jc m:val="centerGroup"/>
+                        </m:oMathParaPr>
+                        <m:oMath xmlns:m="http://schemas.openxmlformats.org/officeDocument/2006/math">
+                          <m:r>
+                            <a:rPr lang="en-US" sz="3200" i="1" smtClean="0">
+                              <a:latin typeface="Cambria Math" panose="02040503050406030204" pitchFamily="18" charset="0"/>
+                            </a:rPr>
+                            <m:t>2</m:t>
+                          </m:r>
+                          <m:r>
+                            <a:rPr lang="en-US" sz="3200" b="0" i="1" smtClean="0">
+                              <a:latin typeface="Cambria Math" panose="02040503050406030204" pitchFamily="18" charset="0"/>
+                            </a:rPr>
+                            <m:t>2.06+1.42</m:t>
+                          </m:r>
+                          <m:r>
+                            <a:rPr lang="en-US" sz="3200" b="0" i="1" smtClean="0">
+                              <a:latin typeface="Cambria Math" panose="02040503050406030204" pitchFamily="18" charset="0"/>
+                            </a:rPr>
+                            <m:t>𝑡</m:t>
+                          </m:r>
+                        </m:oMath>
+                      </m:oMathPara>
+                    </a14:m>
+                    <a:endParaRPr lang="en-US" sz="3200" dirty="0"/>
+                  </a:p>
+                </p:txBody>
+              </p:sp>
+            </mc:Choice>
+            <mc:Fallback xmlns="">
+              <p:sp>
+                <p:nvSpPr>
+                  <p:cNvPr id="3" name="Rectangle 2">
+                    <a:extLst>
+                      <a:ext uri="{FF2B5EF4-FFF2-40B4-BE49-F238E27FC236}">
+                        <a16:creationId xmlns:a16="http://schemas.microsoft.com/office/drawing/2014/main" id="{084818F6-C7C0-5DF1-F745-47E963919782}"/>
+                      </a:ext>
+                    </a:extLst>
+                  </p:cNvPr>
+                  <p:cNvSpPr>
+                    <a:spLocks noRot="1" noChangeAspect="1" noMove="1" noResize="1" noEditPoints="1" noAdjustHandles="1" noChangeArrowheads="1" noChangeShapeType="1" noTextEdit="1"/>
+                  </p:cNvSpPr>
+                  <p:nvPr/>
+                </p:nvSpPr>
+                <p:spPr>
+                  <a:xfrm>
+                    <a:off x="3815255" y="2229466"/>
+                    <a:ext cx="3079533" cy="1261241"/>
+                  </a:xfrm>
+                  <a:prstGeom prst="rect">
+                    <a:avLst/>
+                  </a:prstGeom>
+                  <a:blipFill>
+                    <a:blip r:embed="rId2"/>
+                    <a:stretch>
+                      <a:fillRect/>
+                    </a:stretch>
+                  </a:blipFill>
+                  <a:ln w="38100">
+                    <a:solidFill>
+                      <a:schemeClr val="tx1"/>
+                    </a:solidFill>
+                  </a:ln>
+                </p:spPr>
+                <p:txBody>
+                  <a:bodyPr/>
+                  <a:lstStyle/>
+                  <a:p>
+                    <a:r>
+                      <a:rPr lang="en-US">
+                        <a:noFill/>
+                      </a:rPr>
+                      <a:t> </a:t>
+                    </a:r>
+                  </a:p>
+                </p:txBody>
+              </p:sp>
+            </mc:Fallback>
+          </mc:AlternateContent>
+          <mc:AlternateContent xmlns:mc="http://schemas.openxmlformats.org/markup-compatibility/2006" xmlns:a14="http://schemas.microsoft.com/office/drawing/2010/main">
+            <mc:Choice Requires="a14">
+              <p:sp>
+                <p:nvSpPr>
+                  <p:cNvPr id="4" name="TextBox 3">
+                    <a:extLst>
+                      <a:ext uri="{FF2B5EF4-FFF2-40B4-BE49-F238E27FC236}">
+                        <a16:creationId xmlns:a16="http://schemas.microsoft.com/office/drawing/2014/main" id="{12B2922A-552F-4BA8-65F0-94F9A63B8B34}"/>
+                      </a:ext>
+                    </a:extLst>
+                  </p:cNvPr>
+                  <p:cNvSpPr txBox="1"/>
+                  <p:nvPr/>
+                </p:nvSpPr>
+                <p:spPr>
+                  <a:xfrm>
+                    <a:off x="8177046" y="2503920"/>
+                    <a:ext cx="987973" cy="646331"/>
+                  </a:xfrm>
+                  <a:prstGeom prst="rect">
+                    <a:avLst/>
+                  </a:prstGeom>
+                  <a:noFill/>
+                </p:spPr>
+                <p:txBody>
+                  <a:bodyPr wrap="square" rtlCol="0">
+                    <a:spAutoFit/>
+                  </a:bodyPr>
+                  <a:lstStyle/>
+                  <a:p>
+                    <a:pPr/>
+                    <a14:m>
+                      <m:oMathPara xmlns:m="http://schemas.openxmlformats.org/officeDocument/2006/math">
+                        <m:oMathParaPr>
+                          <m:jc m:val="centerGroup"/>
+                        </m:oMathParaPr>
+                        <m:oMath xmlns:m="http://schemas.openxmlformats.org/officeDocument/2006/math">
+                          <m:acc>
+                            <m:accPr>
+                              <m:chr m:val="̂"/>
+                              <m:ctrlPr>
+                                <a:rPr lang="en-US" sz="3600" i="1" dirty="0" smtClean="0">
+                                  <a:latin typeface="Cambria Math" panose="02040503050406030204" pitchFamily="18" charset="0"/>
+                                </a:rPr>
+                              </m:ctrlPr>
+                            </m:accPr>
+                            <m:e>
+                              <m:r>
+                                <a:rPr lang="en-US" sz="3600" b="0" i="1" dirty="0" smtClean="0">
+                                  <a:latin typeface="Cambria Math" panose="02040503050406030204" pitchFamily="18" charset="0"/>
+                                </a:rPr>
+                                <m:t>𝑐𝑢𝑠𝑡</m:t>
+                              </m:r>
+                            </m:e>
+                          </m:acc>
+                        </m:oMath>
+                      </m:oMathPara>
+                    </a14:m>
+                    <a:endParaRPr/>
+                  </a:p>
+                </p:txBody>
+              </p:sp>
+            </mc:Choice>
+            <mc:Fallback xmlns="">
+              <p:sp>
+                <p:nvSpPr>
+                  <p:cNvPr id="4" name="TextBox 3">
+                    <a:extLst>
+                      <a:ext uri="{FF2B5EF4-FFF2-40B4-BE49-F238E27FC236}">
+                        <a16:creationId xmlns:a16="http://schemas.microsoft.com/office/drawing/2014/main" id="{12B2922A-552F-4BA8-65F0-94F9A63B8B34}"/>
+                      </a:ext>
+                    </a:extLst>
+                  </p:cNvPr>
+                  <p:cNvSpPr txBox="1">
+                    <a:spLocks noRot="1" noChangeAspect="1" noMove="1" noResize="1" noEditPoints="1" noAdjustHandles="1" noChangeArrowheads="1" noChangeShapeType="1" noTextEdit="1"/>
+                  </p:cNvSpPr>
+                  <p:nvPr/>
+                </p:nvSpPr>
+                <p:spPr>
+                  <a:xfrm>
+                    <a:off x="8177046" y="2503920"/>
+                    <a:ext cx="987973" cy="646331"/>
+                  </a:xfrm>
+                  <a:prstGeom prst="rect">
+                    <a:avLst/>
+                  </a:prstGeom>
+                  <a:blipFill>
+                    <a:blip r:embed="rId3"/>
+                    <a:stretch>
+                      <a:fillRect l="-6329" t="-17647" r="-35443" b="-37255"/>
+                    </a:stretch>
+                  </a:blipFill>
+                </p:spPr>
+                <p:txBody>
+                  <a:bodyPr/>
+                  <a:lstStyle/>
+                  <a:p>
+                    <a:r>
+                      <a:rPr lang="en-US">
+                        <a:noFill/>
+                      </a:rPr>
+                      <a:t> </a:t>
+                    </a:r>
+                  </a:p>
+                </p:txBody>
+              </p:sp>
+            </mc:Fallback>
+          </mc:AlternateContent>
+          <p:cxnSp>
+            <p:nvCxnSpPr>
+              <p:cNvPr id="5" name="Straight Arrow Connector 4">
+                <a:extLst>
+                  <a:ext uri="{FF2B5EF4-FFF2-40B4-BE49-F238E27FC236}">
+                    <a16:creationId xmlns:a16="http://schemas.microsoft.com/office/drawing/2014/main" id="{6BFFB7FC-4CDE-D3CE-7D90-7676386C1C3B}"/>
+                  </a:ext>
+                </a:extLst>
+              </p:cNvPr>
+              <p:cNvCxnSpPr>
+                <a:cxnSpLocks/>
+              </p:cNvCxnSpPr>
+              <p:nvPr/>
+            </p:nvCxnSpPr>
+            <p:spPr>
+              <a:xfrm flipV="1">
+                <a:off x="2532994" y="2844698"/>
+                <a:ext cx="1282261" cy="6916"/>
+              </a:xfrm>
+              <a:prstGeom prst="straightConnector1">
+                <a:avLst/>
+              </a:prstGeom>
+              <a:ln w="76200">
+                <a:solidFill>
+                  <a:schemeClr val="bg1">
+                    <a:lumMod val="50000"/>
+                  </a:schemeClr>
+                </a:solidFill>
+                <a:tailEnd type="triangle"/>
+              </a:ln>
+            </p:spPr>
+            <p:style>
+              <a:lnRef idx="2">
+                <a:schemeClr val="accent1"/>
+              </a:lnRef>
+              <a:fillRef idx="0">
+                <a:schemeClr val="accent1"/>
+              </a:fillRef>
+              <a:effectRef idx="1">
+                <a:schemeClr val="accent1"/>
+              </a:effectRef>
+              <a:fontRef idx="minor">
+                <a:schemeClr val="tx1"/>
+              </a:fontRef>
+            </p:style>
+          </p:cxnSp>
+          <p:cxnSp>
+            <p:nvCxnSpPr>
+              <p:cNvPr id="6" name="Straight Arrow Connector 5">
+                <a:extLst>
+                  <a:ext uri="{FF2B5EF4-FFF2-40B4-BE49-F238E27FC236}">
+                    <a16:creationId xmlns:a16="http://schemas.microsoft.com/office/drawing/2014/main" id="{C16F0CE1-99D1-A444-B134-89A61D37EAA5}"/>
+                  </a:ext>
+                </a:extLst>
+              </p:cNvPr>
+              <p:cNvCxnSpPr>
+                <a:cxnSpLocks/>
+              </p:cNvCxnSpPr>
+              <p:nvPr/>
+            </p:nvCxnSpPr>
+            <p:spPr>
+              <a:xfrm flipV="1">
+                <a:off x="6894788" y="2829148"/>
+                <a:ext cx="1241212" cy="30938"/>
+              </a:xfrm>
+              <a:prstGeom prst="straightConnector1">
+                <a:avLst/>
+              </a:prstGeom>
+              <a:ln w="76200">
+                <a:solidFill>
+                  <a:schemeClr val="bg1">
+                    <a:lumMod val="50000"/>
+                  </a:schemeClr>
+                </a:solidFill>
+                <a:tailEnd type="triangle"/>
+              </a:ln>
+            </p:spPr>
+            <p:style>
+              <a:lnRef idx="2">
+                <a:schemeClr val="accent1"/>
+              </a:lnRef>
+              <a:fillRef idx="0">
+                <a:schemeClr val="accent1"/>
+              </a:fillRef>
+              <a:effectRef idx="1">
+                <a:schemeClr val="accent1"/>
+              </a:effectRef>
+              <a:fontRef idx="minor">
+                <a:schemeClr val="tx1"/>
+              </a:fontRef>
+            </p:style>
+          </p:cxnSp>
+        </p:grpSp>
+        <mc:AlternateContent xmlns:mc="http://schemas.openxmlformats.org/markup-compatibility/2006" xmlns:a14="http://schemas.microsoft.com/office/drawing/2010/main">
+          <mc:Choice Requires="a14">
+            <p:sp>
+              <p:nvSpPr>
+                <p:cNvPr id="7" name="TextBox 6">
+                  <a:extLst>
+                    <a:ext uri="{FF2B5EF4-FFF2-40B4-BE49-F238E27FC236}">
+                      <a16:creationId xmlns:a16="http://schemas.microsoft.com/office/drawing/2014/main" id="{2CF35532-8EBD-2090-F812-2C9BB9E4DB35}"/>
+                    </a:ext>
+                  </a:extLst>
+                </p:cNvPr>
+                <p:cNvSpPr txBox="1"/>
+                <p:nvPr/>
+              </p:nvSpPr>
+              <p:spPr>
+                <a:xfrm>
+                  <a:off x="1680209" y="2759988"/>
+                  <a:ext cx="288604" cy="553998"/>
+                </a:xfrm>
+                <a:prstGeom prst="rect">
+                  <a:avLst/>
+                </a:prstGeom>
+                <a:noFill/>
+              </p:spPr>
+              <p:txBody>
+                <a:bodyPr wrap="none" lIns="0" tIns="0" rIns="0" bIns="0" rtlCol="0">
+                  <a:spAutoFit/>
+                </a:bodyPr>
+                <a:lstStyle/>
+                <a:p>
+                  <a:pPr/>
+                  <a14:m>
+                    <m:oMathPara xmlns:m="http://schemas.openxmlformats.org/officeDocument/2006/math">
+                      <m:oMathParaPr>
+                        <m:jc m:val="centerGroup"/>
+                      </m:oMathParaPr>
+                      <m:oMath xmlns:m="http://schemas.openxmlformats.org/officeDocument/2006/math">
+                        <m:r>
+                          <a:rPr lang="en-US" sz="3600" b="0" i="1" smtClean="0">
+                            <a:latin typeface="Cambria Math" panose="02040503050406030204" pitchFamily="18" charset="0"/>
+                          </a:rPr>
+                          <m:t>𝑡</m:t>
+                        </m:r>
+                      </m:oMath>
+                    </m:oMathPara>
+                  </a14:m>
+                  <a:endParaRPr lang="en-US" sz="3600" dirty="0"/>
+                </a:p>
+              </p:txBody>
+            </p:sp>
+          </mc:Choice>
+          <mc:Fallback xmlns="">
+            <p:sp>
+              <p:nvSpPr>
+                <p:cNvPr id="7" name="TextBox 6">
+                  <a:extLst>
+                    <a:ext uri="{FF2B5EF4-FFF2-40B4-BE49-F238E27FC236}">
+                      <a16:creationId xmlns:a16="http://schemas.microsoft.com/office/drawing/2014/main" id="{2CF35532-8EBD-2090-F812-2C9BB9E4DB35}"/>
+                    </a:ext>
+                  </a:extLst>
+                </p:cNvPr>
+                <p:cNvSpPr txBox="1">
+                  <a:spLocks noRot="1" noChangeAspect="1" noMove="1" noResize="1" noEditPoints="1" noAdjustHandles="1" noChangeArrowheads="1" noChangeShapeType="1" noTextEdit="1"/>
+                </p:cNvSpPr>
+                <p:nvPr/>
+              </p:nvSpPr>
+              <p:spPr>
+                <a:xfrm>
+                  <a:off x="1680209" y="2759988"/>
+                  <a:ext cx="288604" cy="553998"/>
+                </a:xfrm>
+                <a:prstGeom prst="rect">
+                  <a:avLst/>
+                </a:prstGeom>
+                <a:blipFill>
+                  <a:blip r:embed="rId4"/>
+                  <a:stretch>
+                    <a:fillRect l="-29167" r="-20833"/>
+                  </a:stretch>
+                </a:blipFill>
+              </p:spPr>
+              <p:txBody>
+                <a:bodyPr/>
+                <a:lstStyle/>
+                <a:p>
+                  <a:r>
+                    <a:rPr lang="en-US">
+                      <a:noFill/>
+                    </a:rPr>
+                    <a:t> </a:t>
+                  </a:r>
+                </a:p>
+              </p:txBody>
+            </p:sp>
+          </mc:Fallback>
+        </mc:AlternateContent>
+      </p:grpSp>
+    </p:spTree>
+    <p:extLst>
+      <p:ext uri="{BB962C8B-B14F-4D97-AF65-F5344CB8AC3E}">
+        <p14:creationId xmlns:p14="http://schemas.microsoft.com/office/powerpoint/2010/main" val="1398332104"/>
+      </p:ext>
+    </p:extLst>
+  </p:cSld>
+  <p:clrMapOvr>
+    <a:masterClrMapping/>
+  </p:clrMapOvr>
+</p:sld>
+</file>
+
 <file path=ppt/slides/slide2.xml><?xml version="1.0" encoding="utf-8"?>
+<p:sld xmlns:a="http://schemas.openxmlformats.org/drawingml/2006/main" xmlns:r="http://schemas.openxmlformats.org/officeDocument/2006/relationships" xmlns:p="http://schemas.openxmlformats.org/presentationml/2006/main">
+  <p:cSld>
+    <p:spTree>
+      <p:nvGrpSpPr>
+        <p:cNvPr id="1" name=""/>
+        <p:cNvGrpSpPr/>
+        <p:nvPr/>
+      </p:nvGrpSpPr>
+      <p:grpSpPr>
+        <a:xfrm>
+          <a:off x="0" y="0"/>
+          <a:ext cx="0" cy="0"/>
+          <a:chOff x="0" y="0"/>
+          <a:chExt cx="0" cy="0"/>
+        </a:xfrm>
+      </p:grpSpPr>
+      <p:grpSp>
+        <p:nvGrpSpPr>
+          <p:cNvPr id="12" name="Group 11">
+            <a:extLst>
+              <a:ext uri="{FF2B5EF4-FFF2-40B4-BE49-F238E27FC236}">
+                <a16:creationId xmlns:a16="http://schemas.microsoft.com/office/drawing/2014/main" id="{E9D93F08-1FB8-6BB6-CEFB-5B4095CD8CA5}"/>
+              </a:ext>
+            </a:extLst>
+          </p:cNvPr>
+          <p:cNvGrpSpPr/>
+          <p:nvPr/>
+        </p:nvGrpSpPr>
+        <p:grpSpPr>
+          <a:xfrm>
+            <a:off x="174174" y="945932"/>
+            <a:ext cx="11843651" cy="4035972"/>
+            <a:chOff x="174174" y="945932"/>
+            <a:chExt cx="11843651" cy="4035972"/>
+          </a:xfrm>
+        </p:grpSpPr>
+        <p:pic>
+          <p:nvPicPr>
+            <p:cNvPr id="3" name="Picture 2" descr="A cartoon of two people&#10;&#10;AI-generated content may be incorrect.">
+              <a:extLst>
+                <a:ext uri="{FF2B5EF4-FFF2-40B4-BE49-F238E27FC236}">
+                  <a16:creationId xmlns:a16="http://schemas.microsoft.com/office/drawing/2014/main" id="{C13DE27C-2108-116D-D4FE-A2DCFDE43E41}"/>
+                </a:ext>
+              </a:extLst>
+            </p:cNvPr>
+            <p:cNvPicPr>
+              <a:picLocks noChangeAspect="1"/>
+            </p:cNvPicPr>
+            <p:nvPr/>
+          </p:nvPicPr>
+          <p:blipFill>
+            <a:blip r:embed="rId2"/>
+            <a:srcRect t="21721" b="27164"/>
+            <a:stretch>
+              <a:fillRect/>
+            </a:stretch>
+          </p:blipFill>
+          <p:spPr>
+            <a:xfrm>
+              <a:off x="174174" y="945932"/>
+              <a:ext cx="11843651" cy="4035972"/>
+            </a:xfrm>
+            <a:prstGeom prst="rect">
+              <a:avLst/>
+            </a:prstGeom>
+          </p:spPr>
+        </p:pic>
+        <p:pic>
+          <p:nvPicPr>
+            <p:cNvPr id="6" name="Picture 5">
+              <a:extLst>
+                <a:ext uri="{FF2B5EF4-FFF2-40B4-BE49-F238E27FC236}">
+                  <a16:creationId xmlns:a16="http://schemas.microsoft.com/office/drawing/2014/main" id="{50110B58-8B40-D18E-FD50-3F57A55DD3A0}"/>
+                </a:ext>
+              </a:extLst>
+            </p:cNvPr>
+            <p:cNvPicPr>
+              <a:picLocks noChangeAspect="1"/>
+            </p:cNvPicPr>
+            <p:nvPr/>
+          </p:nvPicPr>
+          <p:blipFill>
+            <a:blip r:embed="rId3"/>
+            <a:srcRect r="35799"/>
+            <a:stretch>
+              <a:fillRect/>
+            </a:stretch>
+          </p:blipFill>
+          <p:spPr>
+            <a:xfrm rot="19248367">
+              <a:off x="2568918" y="2533856"/>
+              <a:ext cx="252758" cy="585673"/>
+            </a:xfrm>
+            <a:prstGeom prst="rect">
+              <a:avLst/>
+            </a:prstGeom>
+          </p:spPr>
+        </p:pic>
+        <p:pic>
+          <p:nvPicPr>
+            <p:cNvPr id="7" name="Picture 6">
+              <a:extLst>
+                <a:ext uri="{FF2B5EF4-FFF2-40B4-BE49-F238E27FC236}">
+                  <a16:creationId xmlns:a16="http://schemas.microsoft.com/office/drawing/2014/main" id="{EA58BB5D-3CB8-60DF-04FA-2D1FAE8AE8C1}"/>
+                </a:ext>
+              </a:extLst>
+            </p:cNvPr>
+            <p:cNvPicPr>
+              <a:picLocks noChangeAspect="1"/>
+            </p:cNvPicPr>
+            <p:nvPr/>
+          </p:nvPicPr>
+          <p:blipFill>
+            <a:blip r:embed="rId3"/>
+            <a:stretch>
+              <a:fillRect/>
+            </a:stretch>
+          </p:blipFill>
+          <p:spPr>
+            <a:xfrm>
+              <a:off x="4312088" y="1954926"/>
+              <a:ext cx="393700" cy="851336"/>
+            </a:xfrm>
+            <a:prstGeom prst="rect">
+              <a:avLst/>
+            </a:prstGeom>
+          </p:spPr>
+        </p:pic>
+        <p:pic>
+          <p:nvPicPr>
+            <p:cNvPr id="8" name="Picture 7">
+              <a:extLst>
+                <a:ext uri="{FF2B5EF4-FFF2-40B4-BE49-F238E27FC236}">
+                  <a16:creationId xmlns:a16="http://schemas.microsoft.com/office/drawing/2014/main" id="{3F5F044A-1777-8454-1AAB-F42DD3D43E61}"/>
+                </a:ext>
+              </a:extLst>
+            </p:cNvPr>
+            <p:cNvPicPr>
+              <a:picLocks noChangeAspect="1"/>
+            </p:cNvPicPr>
+            <p:nvPr/>
+          </p:nvPicPr>
+          <p:blipFill>
+            <a:blip r:embed="rId3"/>
+            <a:stretch>
+              <a:fillRect/>
+            </a:stretch>
+          </p:blipFill>
+          <p:spPr>
+            <a:xfrm rot="19587385">
+              <a:off x="7215323" y="3000821"/>
+              <a:ext cx="393700" cy="452365"/>
+            </a:xfrm>
+            <a:prstGeom prst="rect">
+              <a:avLst/>
+            </a:prstGeom>
+          </p:spPr>
+        </p:pic>
+        <p:sp>
+          <p:nvSpPr>
+            <p:cNvPr id="9" name="Rectangle 8">
+              <a:extLst>
+                <a:ext uri="{FF2B5EF4-FFF2-40B4-BE49-F238E27FC236}">
+                  <a16:creationId xmlns:a16="http://schemas.microsoft.com/office/drawing/2014/main" id="{94EAFAB5-E6F0-57A3-777B-A2FE9110C080}"/>
+                </a:ext>
+              </a:extLst>
+            </p:cNvPr>
+            <p:cNvSpPr/>
+            <p:nvPr/>
+          </p:nvSpPr>
+          <p:spPr>
+            <a:xfrm>
+              <a:off x="4971393" y="1954926"/>
+              <a:ext cx="262759" cy="515005"/>
+            </a:xfrm>
+            <a:prstGeom prst="rect">
+              <a:avLst/>
+            </a:prstGeom>
+            <a:solidFill>
+              <a:schemeClr val="bg1"/>
+            </a:solidFill>
+            <a:ln>
+              <a:noFill/>
+            </a:ln>
+          </p:spPr>
+          <p:style>
+            <a:lnRef idx="2">
+              <a:schemeClr val="accent1">
+                <a:shade val="15000"/>
+              </a:schemeClr>
+            </a:lnRef>
+            <a:fillRef idx="1">
+              <a:schemeClr val="accent1"/>
+            </a:fillRef>
+            <a:effectRef idx="0">
+              <a:schemeClr val="accent1"/>
+            </a:effectRef>
+            <a:fontRef idx="minor">
+              <a:schemeClr val="lt1"/>
+            </a:fontRef>
+          </p:style>
+          <p:txBody>
+            <a:bodyPr rtlCol="0" anchor="ctr"/>
+            <a:lstStyle/>
+            <a:p>
+              <a:pPr algn="ctr"/>
+              <a:endParaRPr lang="en-US"/>
+            </a:p>
+          </p:txBody>
+        </p:sp>
+        <p:sp>
+          <p:nvSpPr>
+            <p:cNvPr id="10" name="Rectangle 9">
+              <a:extLst>
+                <a:ext uri="{FF2B5EF4-FFF2-40B4-BE49-F238E27FC236}">
+                  <a16:creationId xmlns:a16="http://schemas.microsoft.com/office/drawing/2014/main" id="{1F0B51F8-A916-CEDA-7C5C-E8D729956811}"/>
+                </a:ext>
+              </a:extLst>
+            </p:cNvPr>
+            <p:cNvSpPr/>
+            <p:nvPr/>
+          </p:nvSpPr>
+          <p:spPr>
+            <a:xfrm>
+              <a:off x="1387366" y="2615326"/>
+              <a:ext cx="220717" cy="348592"/>
+            </a:xfrm>
+            <a:prstGeom prst="rect">
+              <a:avLst/>
+            </a:prstGeom>
+            <a:solidFill>
+              <a:schemeClr val="bg1"/>
+            </a:solidFill>
+            <a:ln>
+              <a:noFill/>
+            </a:ln>
+          </p:spPr>
+          <p:style>
+            <a:lnRef idx="2">
+              <a:schemeClr val="accent1">
+                <a:shade val="15000"/>
+              </a:schemeClr>
+            </a:lnRef>
+            <a:fillRef idx="1">
+              <a:schemeClr val="accent1"/>
+            </a:fillRef>
+            <a:effectRef idx="0">
+              <a:schemeClr val="accent1"/>
+            </a:effectRef>
+            <a:fontRef idx="minor">
+              <a:schemeClr val="lt1"/>
+            </a:fontRef>
+          </p:style>
+          <p:txBody>
+            <a:bodyPr rtlCol="0" anchor="ctr"/>
+            <a:lstStyle/>
+            <a:p>
+              <a:pPr algn="ctr"/>
+              <a:endParaRPr lang="en-US"/>
+            </a:p>
+          </p:txBody>
+        </p:sp>
+        <p:sp>
+          <p:nvSpPr>
+            <p:cNvPr id="11" name="Rectangle 10">
+              <a:extLst>
+                <a:ext uri="{FF2B5EF4-FFF2-40B4-BE49-F238E27FC236}">
+                  <a16:creationId xmlns:a16="http://schemas.microsoft.com/office/drawing/2014/main" id="{92473D3E-6E9E-6542-2577-34925DC8CB98}"/>
+                </a:ext>
+              </a:extLst>
+            </p:cNvPr>
+            <p:cNvSpPr/>
+            <p:nvPr/>
+          </p:nvSpPr>
+          <p:spPr>
+            <a:xfrm>
+              <a:off x="1303282" y="2806262"/>
+              <a:ext cx="220717" cy="304800"/>
+            </a:xfrm>
+            <a:prstGeom prst="rect">
+              <a:avLst/>
+            </a:prstGeom>
+            <a:solidFill>
+              <a:schemeClr val="bg1"/>
+            </a:solidFill>
+            <a:ln>
+              <a:noFill/>
+            </a:ln>
+          </p:spPr>
+          <p:style>
+            <a:lnRef idx="2">
+              <a:schemeClr val="accent1">
+                <a:shade val="15000"/>
+              </a:schemeClr>
+            </a:lnRef>
+            <a:fillRef idx="1">
+              <a:schemeClr val="accent1"/>
+            </a:fillRef>
+            <a:effectRef idx="0">
+              <a:schemeClr val="accent1"/>
+            </a:effectRef>
+            <a:fontRef idx="minor">
+              <a:schemeClr val="lt1"/>
+            </a:fontRef>
+          </p:style>
+          <p:txBody>
+            <a:bodyPr rtlCol="0" anchor="ctr"/>
+            <a:lstStyle/>
+            <a:p>
+              <a:pPr algn="ctr"/>
+              <a:endParaRPr lang="en-US"/>
+            </a:p>
+          </p:txBody>
+        </p:sp>
+      </p:grpSp>
+    </p:spTree>
+    <p:extLst>
+      <p:ext uri="{BB962C8B-B14F-4D97-AF65-F5344CB8AC3E}">
+        <p14:creationId xmlns:p14="http://schemas.microsoft.com/office/powerpoint/2010/main" val="2434184301"/>
+      </p:ext>
+    </p:extLst>
+  </p:cSld>
+  <p:clrMapOvr>
+    <a:masterClrMapping/>
+  </p:clrMapOvr>
+</p:sld>
+</file>
+
+<file path=ppt/slides/slide3.xml><?xml version="1.0" encoding="utf-8"?>
+<p:sld xmlns:a="http://schemas.openxmlformats.org/drawingml/2006/main" xmlns:r="http://schemas.openxmlformats.org/officeDocument/2006/relationships" xmlns:p="http://schemas.openxmlformats.org/presentationml/2006/main">
+  <p:cSld>
+    <p:spTree>
+      <p:nvGrpSpPr>
+        <p:cNvPr id="1" name=""/>
+        <p:cNvGrpSpPr/>
+        <p:nvPr/>
+      </p:nvGrpSpPr>
+      <p:grpSpPr>
+        <a:xfrm>
+          <a:off x="0" y="0"/>
+          <a:ext cx="0" cy="0"/>
+          <a:chOff x="0" y="0"/>
+          <a:chExt cx="0" cy="0"/>
+        </a:xfrm>
+      </p:grpSpPr>
+      <p:pic>
+        <p:nvPicPr>
+          <p:cNvPr id="3" name="Picture 2" descr="A cartoon of a person talking to a house&#10;&#10;AI-generated content may be incorrect.">
+            <a:extLst>
+              <a:ext uri="{FF2B5EF4-FFF2-40B4-BE49-F238E27FC236}">
+                <a16:creationId xmlns:a16="http://schemas.microsoft.com/office/drawing/2014/main" id="{6D56B31F-3A54-FDB9-BEF3-8DC602807C9A}"/>
+              </a:ext>
+            </a:extLst>
+          </p:cNvPr>
+          <p:cNvPicPr>
+            <a:picLocks noChangeAspect="1"/>
+          </p:cNvPicPr>
+          <p:nvPr/>
+        </p:nvPicPr>
+        <p:blipFill>
+          <a:blip r:embed="rId2"/>
+          <a:srcRect t="21808" b="26277"/>
+          <a:stretch>
+            <a:fillRect/>
+          </a:stretch>
+        </p:blipFill>
+        <p:spPr>
+          <a:xfrm>
+            <a:off x="581592" y="1446028"/>
+            <a:ext cx="11028816" cy="3817088"/>
+          </a:xfrm>
+          <a:prstGeom prst="rect">
+            <a:avLst/>
+          </a:prstGeom>
+        </p:spPr>
+      </p:pic>
+    </p:spTree>
+    <p:extLst>
+      <p:ext uri="{BB962C8B-B14F-4D97-AF65-F5344CB8AC3E}">
+        <p14:creationId xmlns:p14="http://schemas.microsoft.com/office/powerpoint/2010/main" val="3148305379"/>
+      </p:ext>
+    </p:extLst>
+  </p:cSld>
+  <p:clrMapOvr>
+    <a:masterClrMapping/>
+  </p:clrMapOvr>
+</p:sld>
+</file>
+
+<file path=ppt/slides/slide4.xml><?xml version="1.0" encoding="utf-8"?>
 <p:sld xmlns:a="http://schemas.openxmlformats.org/drawingml/2006/main" xmlns:r="http://schemas.openxmlformats.org/officeDocument/2006/relationships" xmlns:p="http://schemas.openxmlformats.org/presentationml/2006/main">
   <p:cSld>
     <p:spTree>
@@ -5215,7 +7297,7 @@
 </p:sld>
 </file>
 
-<file path=ppt/slides/slide3.xml><?xml version="1.0" encoding="utf-8"?>
+<file path=ppt/slides/slide5.xml><?xml version="1.0" encoding="utf-8"?>
 <p:sld xmlns:a="http://schemas.openxmlformats.org/drawingml/2006/main" xmlns:r="http://schemas.openxmlformats.org/officeDocument/2006/relationships" xmlns:p="http://schemas.openxmlformats.org/presentationml/2006/main">
   <p:cSld>
     <p:spTree>
@@ -5647,7 +7729,7 @@
 </p:sld>
 </file>
 
-<file path=ppt/slides/slide4.xml><?xml version="1.0" encoding="utf-8"?>
+<file path=ppt/slides/slide6.xml><?xml version="1.0" encoding="utf-8"?>
 <p:sld xmlns:a="http://schemas.openxmlformats.org/drawingml/2006/main" xmlns:r="http://schemas.openxmlformats.org/officeDocument/2006/relationships" xmlns:p="http://schemas.openxmlformats.org/presentationml/2006/main">
   <p:cSld>
     <p:spTree>
@@ -5869,7 +7951,7 @@
 </p:sld>
 </file>
 
-<file path=ppt/slides/slide5.xml><?xml version="1.0" encoding="utf-8"?>
+<file path=ppt/slides/slide7.xml><?xml version="1.0" encoding="utf-8"?>
 <p:sld xmlns:a="http://schemas.openxmlformats.org/drawingml/2006/main" xmlns:r="http://schemas.openxmlformats.org/officeDocument/2006/relationships" xmlns:p="http://schemas.openxmlformats.org/presentationml/2006/main">
   <p:cSld>
     <p:spTree>
@@ -5930,7 +8012,7 @@
 </p:sld>
 </file>
 
-<file path=ppt/slides/slide6.xml><?xml version="1.0" encoding="utf-8"?>
+<file path=ppt/slides/slide8.xml><?xml version="1.0" encoding="utf-8"?>
 <p:sld xmlns:a="http://schemas.openxmlformats.org/drawingml/2006/main" xmlns:r="http://schemas.openxmlformats.org/officeDocument/2006/relationships" xmlns:p="http://schemas.openxmlformats.org/presentationml/2006/main">
   <p:cSld>
     <p:spTree>
@@ -6239,7 +8321,7 @@
 </p:sld>
 </file>
 
-<file path=ppt/slides/slide7.xml><?xml version="1.0" encoding="utf-8"?>
+<file path=ppt/slides/slide9.xml><?xml version="1.0" encoding="utf-8"?>
 <p:sld xmlns:a="http://schemas.openxmlformats.org/drawingml/2006/main" xmlns:r="http://schemas.openxmlformats.org/officeDocument/2006/relationships" xmlns:p="http://schemas.openxmlformats.org/presentationml/2006/main">
   <p:cSld>
     <p:spTree>
@@ -6290,1684 +8372,6 @@
     <p:extLst>
       <p:ext uri="{BB962C8B-B14F-4D97-AF65-F5344CB8AC3E}">
         <p14:creationId xmlns:p14="http://schemas.microsoft.com/office/powerpoint/2010/main" val="497765789"/>
-      </p:ext>
-    </p:extLst>
-  </p:cSld>
-  <p:clrMapOvr>
-    <a:masterClrMapping/>
-  </p:clrMapOvr>
-</p:sld>
-</file>
-
-<file path=ppt/slides/slide8.xml><?xml version="1.0" encoding="utf-8"?>
-<p:sld xmlns:a="http://schemas.openxmlformats.org/drawingml/2006/main" xmlns:r="http://schemas.openxmlformats.org/officeDocument/2006/relationships" xmlns:p="http://schemas.openxmlformats.org/presentationml/2006/main">
-  <p:cSld>
-    <p:spTree>
-      <p:nvGrpSpPr>
-        <p:cNvPr id="1" name=""/>
-        <p:cNvGrpSpPr/>
-        <p:nvPr/>
-      </p:nvGrpSpPr>
-      <p:grpSpPr>
-        <a:xfrm>
-          <a:off x="0" y="0"/>
-          <a:ext cx="0" cy="0"/>
-          <a:chOff x="0" y="0"/>
-          <a:chExt cx="0" cy="0"/>
-        </a:xfrm>
-      </p:grpSpPr>
-      <p:grpSp>
-        <p:nvGrpSpPr>
-          <p:cNvPr id="13" name="Group 12">
-            <a:extLst>
-              <a:ext uri="{FF2B5EF4-FFF2-40B4-BE49-F238E27FC236}">
-                <a16:creationId xmlns:a16="http://schemas.microsoft.com/office/drawing/2014/main" id="{A4056F16-7DF2-C97A-6403-6C96D4808F18}"/>
-              </a:ext>
-            </a:extLst>
-          </p:cNvPr>
-          <p:cNvGrpSpPr/>
-          <p:nvPr/>
-        </p:nvGrpSpPr>
-        <p:grpSpPr>
-          <a:xfrm>
-            <a:off x="662152" y="810358"/>
-            <a:ext cx="9543394" cy="1384995"/>
-            <a:chOff x="662152" y="2167589"/>
-            <a:chExt cx="9543394" cy="1384995"/>
-          </a:xfrm>
-        </p:grpSpPr>
-        <p:sp>
-          <p:nvSpPr>
-            <p:cNvPr id="2" name="Rectangle 1">
-              <a:extLst>
-                <a:ext uri="{FF2B5EF4-FFF2-40B4-BE49-F238E27FC236}">
-                  <a16:creationId xmlns:a16="http://schemas.microsoft.com/office/drawing/2014/main" id="{0A3E5002-7B6B-E02E-628E-90D766B6B000}"/>
-                </a:ext>
-              </a:extLst>
-            </p:cNvPr>
-            <p:cNvSpPr/>
-            <p:nvPr/>
-          </p:nvSpPr>
-          <p:spPr>
-            <a:xfrm>
-              <a:off x="3815255" y="2229466"/>
-              <a:ext cx="2469931" cy="1261241"/>
-            </a:xfrm>
-            <a:prstGeom prst="rect">
-              <a:avLst/>
-            </a:prstGeom>
-            <a:ln w="38100">
-              <a:solidFill>
-                <a:schemeClr val="tx1"/>
-              </a:solidFill>
-            </a:ln>
-          </p:spPr>
-          <p:style>
-            <a:lnRef idx="2">
-              <a:schemeClr val="accent6"/>
-            </a:lnRef>
-            <a:fillRef idx="1">
-              <a:schemeClr val="lt1"/>
-            </a:fillRef>
-            <a:effectRef idx="0">
-              <a:schemeClr val="accent6"/>
-            </a:effectRef>
-            <a:fontRef idx="minor">
-              <a:schemeClr val="dk1"/>
-            </a:fontRef>
-          </p:style>
-          <p:txBody>
-            <a:bodyPr rtlCol="0" anchor="ctr"/>
-            <a:lstStyle/>
-            <a:p>
-              <a:pPr algn="ctr"/>
-              <a:r>
-                <a:rPr lang="en-US" sz="3200" dirty="0"/>
-                <a:t>Beach kiosk model </a:t>
-              </a:r>
-            </a:p>
-          </p:txBody>
-        </p:sp>
-        <p:sp>
-          <p:nvSpPr>
-            <p:cNvPr id="3" name="TextBox 2">
-              <a:extLst>
-                <a:ext uri="{FF2B5EF4-FFF2-40B4-BE49-F238E27FC236}">
-                  <a16:creationId xmlns:a16="http://schemas.microsoft.com/office/drawing/2014/main" id="{A01A5C40-7FF4-F412-513F-365DD14DAA63}"/>
-                </a:ext>
-              </a:extLst>
-            </p:cNvPr>
-            <p:cNvSpPr txBox="1"/>
-            <p:nvPr/>
-          </p:nvSpPr>
-          <p:spPr>
-            <a:xfrm>
-              <a:off x="662152" y="2598476"/>
-              <a:ext cx="2102179" cy="523220"/>
-            </a:xfrm>
-            <a:prstGeom prst="rect">
-              <a:avLst/>
-            </a:prstGeom>
-            <a:noFill/>
-          </p:spPr>
-          <p:txBody>
-            <a:bodyPr wrap="none" rtlCol="0">
-              <a:spAutoFit/>
-            </a:bodyPr>
-            <a:lstStyle/>
-            <a:p>
-              <a:r>
-                <a:rPr lang="en-US" sz="2800" dirty="0"/>
-                <a:t>temperature</a:t>
-              </a:r>
-            </a:p>
-          </p:txBody>
-        </p:sp>
-        <p:sp>
-          <p:nvSpPr>
-            <p:cNvPr id="4" name="TextBox 3">
-              <a:extLst>
-                <a:ext uri="{FF2B5EF4-FFF2-40B4-BE49-F238E27FC236}">
-                  <a16:creationId xmlns:a16="http://schemas.microsoft.com/office/drawing/2014/main" id="{2476DD39-9FED-DADF-4379-9DE2E87041E0}"/>
-                </a:ext>
-              </a:extLst>
-            </p:cNvPr>
-            <p:cNvSpPr txBox="1"/>
-            <p:nvPr/>
-          </p:nvSpPr>
-          <p:spPr>
-            <a:xfrm>
-              <a:off x="7578951" y="2167589"/>
-              <a:ext cx="2626595" cy="1384995"/>
-            </a:xfrm>
-            <a:prstGeom prst="rect">
-              <a:avLst/>
-            </a:prstGeom>
-            <a:noFill/>
-          </p:spPr>
-          <p:txBody>
-            <a:bodyPr wrap="square" rtlCol="0">
-              <a:spAutoFit/>
-            </a:bodyPr>
-            <a:lstStyle/>
-            <a:p>
-              <a:r>
-                <a:rPr lang="en-US" sz="2800" dirty="0"/>
-                <a:t>Predicted number of customers</a:t>
-              </a:r>
-            </a:p>
-          </p:txBody>
-        </p:sp>
-        <p:cxnSp>
-          <p:nvCxnSpPr>
-            <p:cNvPr id="6" name="Straight Arrow Connector 5">
-              <a:extLst>
-                <a:ext uri="{FF2B5EF4-FFF2-40B4-BE49-F238E27FC236}">
-                  <a16:creationId xmlns:a16="http://schemas.microsoft.com/office/drawing/2014/main" id="{355BF273-DE9B-E1D6-6672-CA1B546D8C2E}"/>
-                </a:ext>
-              </a:extLst>
-            </p:cNvPr>
-            <p:cNvCxnSpPr>
-              <a:cxnSpLocks/>
-              <a:stCxn id="3" idx="3"/>
-            </p:cNvCxnSpPr>
-            <p:nvPr/>
-          </p:nvCxnSpPr>
-          <p:spPr>
-            <a:xfrm flipV="1">
-              <a:off x="2764331" y="2844698"/>
-              <a:ext cx="1050924" cy="15388"/>
-            </a:xfrm>
-            <a:prstGeom prst="straightConnector1">
-              <a:avLst/>
-            </a:prstGeom>
-            <a:ln w="76200">
-              <a:solidFill>
-                <a:schemeClr val="bg1">
-                  <a:lumMod val="50000"/>
-                </a:schemeClr>
-              </a:solidFill>
-              <a:tailEnd type="triangle"/>
-            </a:ln>
-          </p:spPr>
-          <p:style>
-            <a:lnRef idx="2">
-              <a:schemeClr val="accent1"/>
-            </a:lnRef>
-            <a:fillRef idx="0">
-              <a:schemeClr val="accent1"/>
-            </a:fillRef>
-            <a:effectRef idx="1">
-              <a:schemeClr val="accent1"/>
-            </a:effectRef>
-            <a:fontRef idx="minor">
-              <a:schemeClr val="tx1"/>
-            </a:fontRef>
-          </p:style>
-        </p:cxnSp>
-        <p:cxnSp>
-          <p:nvCxnSpPr>
-            <p:cNvPr id="8" name="Straight Arrow Connector 7">
-              <a:extLst>
-                <a:ext uri="{FF2B5EF4-FFF2-40B4-BE49-F238E27FC236}">
-                  <a16:creationId xmlns:a16="http://schemas.microsoft.com/office/drawing/2014/main" id="{61E6F99B-3A03-6C92-599D-58D7E1685353}"/>
-                </a:ext>
-              </a:extLst>
-            </p:cNvPr>
-            <p:cNvCxnSpPr>
-              <a:cxnSpLocks/>
-            </p:cNvCxnSpPr>
-            <p:nvPr/>
-          </p:nvCxnSpPr>
-          <p:spPr>
-            <a:xfrm flipV="1">
-              <a:off x="6285189" y="2829148"/>
-              <a:ext cx="1241212" cy="30938"/>
-            </a:xfrm>
-            <a:prstGeom prst="straightConnector1">
-              <a:avLst/>
-            </a:prstGeom>
-            <a:ln w="76200">
-              <a:solidFill>
-                <a:schemeClr val="bg1">
-                  <a:lumMod val="50000"/>
-                </a:schemeClr>
-              </a:solidFill>
-              <a:tailEnd type="triangle"/>
-            </a:ln>
-          </p:spPr>
-          <p:style>
-            <a:lnRef idx="2">
-              <a:schemeClr val="accent1"/>
-            </a:lnRef>
-            <a:fillRef idx="0">
-              <a:schemeClr val="accent1"/>
-            </a:fillRef>
-            <a:effectRef idx="1">
-              <a:schemeClr val="accent1"/>
-            </a:effectRef>
-            <a:fontRef idx="minor">
-              <a:schemeClr val="tx1"/>
-            </a:fontRef>
-          </p:style>
-        </p:cxnSp>
-      </p:grpSp>
-      <p:grpSp>
-        <p:nvGrpSpPr>
-          <p:cNvPr id="30" name="Group 29">
-            <a:extLst>
-              <a:ext uri="{FF2B5EF4-FFF2-40B4-BE49-F238E27FC236}">
-                <a16:creationId xmlns:a16="http://schemas.microsoft.com/office/drawing/2014/main" id="{4ABD37B4-9E1F-154D-2392-4C73F07FE41F}"/>
-              </a:ext>
-            </a:extLst>
-          </p:cNvPr>
-          <p:cNvGrpSpPr/>
-          <p:nvPr/>
-        </p:nvGrpSpPr>
-        <p:grpSpPr>
-          <a:xfrm>
-            <a:off x="1776461" y="4355514"/>
-            <a:ext cx="7251924" cy="1261241"/>
-            <a:chOff x="1776461" y="4355514"/>
-            <a:chExt cx="7251924" cy="1261241"/>
-          </a:xfrm>
-        </p:grpSpPr>
-        <p:grpSp>
-          <p:nvGrpSpPr>
-            <p:cNvPr id="14" name="Group 13">
-              <a:extLst>
-                <a:ext uri="{FF2B5EF4-FFF2-40B4-BE49-F238E27FC236}">
-                  <a16:creationId xmlns:a16="http://schemas.microsoft.com/office/drawing/2014/main" id="{A66FB24D-9BAD-3928-3B7C-189E29BB25E4}"/>
-                </a:ext>
-              </a:extLst>
-            </p:cNvPr>
-            <p:cNvGrpSpPr/>
-            <p:nvPr/>
-          </p:nvGrpSpPr>
-          <p:grpSpPr>
-            <a:xfrm>
-              <a:off x="2396360" y="4355514"/>
-              <a:ext cx="6632025" cy="1261241"/>
-              <a:chOff x="2532994" y="2229466"/>
-              <a:chExt cx="6632025" cy="1261241"/>
-            </a:xfrm>
-          </p:grpSpPr>
-          <mc:AlternateContent xmlns:mc="http://schemas.openxmlformats.org/markup-compatibility/2006">
-            <mc:Choice xmlns:a14="http://schemas.microsoft.com/office/drawing/2010/main" Requires="a14">
-              <p:sp>
-                <p:nvSpPr>
-                  <p:cNvPr id="15" name="Rectangle 14">
-                    <a:extLst>
-                      <a:ext uri="{FF2B5EF4-FFF2-40B4-BE49-F238E27FC236}">
-                        <a16:creationId xmlns:a16="http://schemas.microsoft.com/office/drawing/2014/main" id="{C7551B2C-1AA9-7E38-DD98-FDAADE8941B1}"/>
-                      </a:ext>
-                    </a:extLst>
-                  </p:cNvPr>
-                  <p:cNvSpPr/>
-                  <p:nvPr/>
-                </p:nvSpPr>
-                <p:spPr>
-                  <a:xfrm>
-                    <a:off x="3815255" y="2229466"/>
-                    <a:ext cx="3079533" cy="1261241"/>
-                  </a:xfrm>
-                  <a:prstGeom prst="rect">
-                    <a:avLst/>
-                  </a:prstGeom>
-                  <a:ln w="38100">
-                    <a:solidFill>
-                      <a:schemeClr val="tx1"/>
-                    </a:solidFill>
-                  </a:ln>
-                </p:spPr>
-                <p:style>
-                  <a:lnRef idx="2">
-                    <a:schemeClr val="accent6"/>
-                  </a:lnRef>
-                  <a:fillRef idx="1">
-                    <a:schemeClr val="lt1"/>
-                  </a:fillRef>
-                  <a:effectRef idx="0">
-                    <a:schemeClr val="accent6"/>
-                  </a:effectRef>
-                  <a:fontRef idx="minor">
-                    <a:schemeClr val="dk1"/>
-                  </a:fontRef>
-                </p:style>
-                <p:txBody>
-                  <a:bodyPr rtlCol="0" anchor="ctr"/>
-                  <a:lstStyle/>
-                  <a:p>
-                    <a:pPr algn="ctr"/>
-                    <a14:m>
-                      <m:oMathPara xmlns:m="http://schemas.openxmlformats.org/officeDocument/2006/math">
-                        <m:oMathParaPr>
-                          <m:jc m:val="centerGroup"/>
-                        </m:oMathParaPr>
-                        <m:oMath xmlns:m="http://schemas.openxmlformats.org/officeDocument/2006/math">
-                          <m:r>
-                            <a:rPr lang="en-US" sz="3200" b="0" i="1" smtClean="0">
-                              <a:latin typeface="Cambria Math" panose="02040503050406030204" pitchFamily="18" charset="0"/>
-                            </a:rPr>
-                            <m:t>15+2</m:t>
-                          </m:r>
-                          <m:r>
-                            <a:rPr lang="en-US" sz="3200" b="0" i="1" smtClean="0">
-                              <a:latin typeface="Cambria Math" panose="02040503050406030204" pitchFamily="18" charset="0"/>
-                            </a:rPr>
-                            <m:t>𝑡</m:t>
-                          </m:r>
-                        </m:oMath>
-                      </m:oMathPara>
-                    </a14:m>
-                    <a:endParaRPr lang="en-US" sz="3200" dirty="0"/>
-                  </a:p>
-                </p:txBody>
-              </p:sp>
-            </mc:Choice>
-            <mc:Fallback>
-              <p:sp>
-                <p:nvSpPr>
-                  <p:cNvPr id="15" name="Rectangle 14">
-                    <a:extLst>
-                      <a:ext uri="{FF2B5EF4-FFF2-40B4-BE49-F238E27FC236}">
-                        <a16:creationId xmlns:a16="http://schemas.microsoft.com/office/drawing/2014/main" id="{C7551B2C-1AA9-7E38-DD98-FDAADE8941B1}"/>
-                      </a:ext>
-                    </a:extLst>
-                  </p:cNvPr>
-                  <p:cNvSpPr>
-                    <a:spLocks noRot="1" noChangeAspect="1" noMove="1" noResize="1" noEditPoints="1" noAdjustHandles="1" noChangeArrowheads="1" noChangeShapeType="1" noTextEdit="1"/>
-                  </p:cNvSpPr>
-                  <p:nvPr/>
-                </p:nvSpPr>
-                <p:spPr>
-                  <a:xfrm>
-                    <a:off x="3815255" y="2229466"/>
-                    <a:ext cx="3079533" cy="1261241"/>
-                  </a:xfrm>
-                  <a:prstGeom prst="rect">
-                    <a:avLst/>
-                  </a:prstGeom>
-                  <a:blipFill>
-                    <a:blip r:embed="rId2"/>
-                    <a:stretch>
-                      <a:fillRect/>
-                    </a:stretch>
-                  </a:blipFill>
-                  <a:ln w="38100">
-                    <a:solidFill>
-                      <a:schemeClr val="tx1"/>
-                    </a:solidFill>
-                  </a:ln>
-                </p:spPr>
-                <p:txBody>
-                  <a:bodyPr/>
-                  <a:lstStyle/>
-                  <a:p>
-                    <a:r>
-                      <a:rPr lang="en-US">
-                        <a:noFill/>
-                      </a:rPr>
-                      <a:t> </a:t>
-                    </a:r>
-                  </a:p>
-                </p:txBody>
-              </p:sp>
-            </mc:Fallback>
-          </mc:AlternateContent>
-          <mc:AlternateContent xmlns:mc="http://schemas.openxmlformats.org/markup-compatibility/2006">
-            <mc:Choice xmlns:a14="http://schemas.microsoft.com/office/drawing/2010/main" Requires="a14">
-              <p:sp>
-                <p:nvSpPr>
-                  <p:cNvPr id="17" name="TextBox 16">
-                    <a:extLst>
-                      <a:ext uri="{FF2B5EF4-FFF2-40B4-BE49-F238E27FC236}">
-                        <a16:creationId xmlns:a16="http://schemas.microsoft.com/office/drawing/2014/main" id="{7E5338C1-7C34-0A28-59B0-12735D42A3EF}"/>
-                      </a:ext>
-                    </a:extLst>
-                  </p:cNvPr>
-                  <p:cNvSpPr txBox="1"/>
-                  <p:nvPr/>
-                </p:nvSpPr>
-                <p:spPr>
-                  <a:xfrm>
-                    <a:off x="8177046" y="2503920"/>
-                    <a:ext cx="987973" cy="646331"/>
-                  </a:xfrm>
-                  <a:prstGeom prst="rect">
-                    <a:avLst/>
-                  </a:prstGeom>
-                  <a:noFill/>
-                </p:spPr>
-                <p:txBody>
-                  <a:bodyPr wrap="square" rtlCol="0">
-                    <a:spAutoFit/>
-                  </a:bodyPr>
-                  <a:lstStyle/>
-                  <a:p>
-                    <a:r>
-                      <a:rPr lang="en-US" sz="3600" dirty="0"/>
-                      <a:t>155</a:t>
-                    </a:r>
-                    <a14:m/>
-                  </a:p>
-                </p:txBody>
-              </p:sp>
-            </mc:Choice>
-            <mc:Fallback>
-              <p:sp>
-                <p:nvSpPr>
-                  <p:cNvPr id="17" name="TextBox 16">
-                    <a:extLst>
-                      <a:ext uri="{FF2B5EF4-FFF2-40B4-BE49-F238E27FC236}">
-                        <a16:creationId xmlns:a16="http://schemas.microsoft.com/office/drawing/2014/main" id="{7E5338C1-7C34-0A28-59B0-12735D42A3EF}"/>
-                      </a:ext>
-                    </a:extLst>
-                  </p:cNvPr>
-                  <p:cNvSpPr txBox="1">
-                    <a:spLocks noRot="1" noChangeAspect="1" noMove="1" noResize="1" noEditPoints="1" noAdjustHandles="1" noChangeArrowheads="1" noChangeShapeType="1" noTextEdit="1"/>
-                  </p:cNvSpPr>
-                  <p:nvPr/>
-                </p:nvSpPr>
-                <p:spPr>
-                  <a:xfrm>
-                    <a:off x="8177046" y="2503920"/>
-                    <a:ext cx="987973" cy="646331"/>
-                  </a:xfrm>
-                  <a:prstGeom prst="rect">
-                    <a:avLst/>
-                  </a:prstGeom>
-                  <a:blipFill>
-                    <a:blip r:embed="rId3"/>
-                    <a:stretch>
-                      <a:fillRect l="-19231" t="-15385" r="-21795" b="-32692"/>
-                    </a:stretch>
-                  </a:blipFill>
-                </p:spPr>
-                <p:txBody>
-                  <a:bodyPr/>
-                  <a:lstStyle/>
-                  <a:p>
-                    <a:r>
-                      <a:rPr lang="en-US">
-                        <a:noFill/>
-                      </a:rPr>
-                      <a:t> </a:t>
-                    </a:r>
-                  </a:p>
-                </p:txBody>
-              </p:sp>
-            </mc:Fallback>
-          </mc:AlternateContent>
-          <p:cxnSp>
-            <p:nvCxnSpPr>
-              <p:cNvPr id="18" name="Straight Arrow Connector 17">
-                <a:extLst>
-                  <a:ext uri="{FF2B5EF4-FFF2-40B4-BE49-F238E27FC236}">
-                    <a16:creationId xmlns:a16="http://schemas.microsoft.com/office/drawing/2014/main" id="{137A6BC3-E0E3-B011-335E-EBAA4F3640DA}"/>
-                  </a:ext>
-                </a:extLst>
-              </p:cNvPr>
-              <p:cNvCxnSpPr>
-                <a:cxnSpLocks/>
-              </p:cNvCxnSpPr>
-              <p:nvPr/>
-            </p:nvCxnSpPr>
-            <p:spPr>
-              <a:xfrm flipV="1">
-                <a:off x="2532994" y="2844698"/>
-                <a:ext cx="1282261" cy="6916"/>
-              </a:xfrm>
-              <a:prstGeom prst="straightConnector1">
-                <a:avLst/>
-              </a:prstGeom>
-              <a:ln w="76200">
-                <a:solidFill>
-                  <a:schemeClr val="bg1">
-                    <a:lumMod val="50000"/>
-                  </a:schemeClr>
-                </a:solidFill>
-                <a:tailEnd type="triangle"/>
-              </a:ln>
-            </p:spPr>
-            <p:style>
-              <a:lnRef idx="2">
-                <a:schemeClr val="accent1"/>
-              </a:lnRef>
-              <a:fillRef idx="0">
-                <a:schemeClr val="accent1"/>
-              </a:fillRef>
-              <a:effectRef idx="1">
-                <a:schemeClr val="accent1"/>
-              </a:effectRef>
-              <a:fontRef idx="minor">
-                <a:schemeClr val="tx1"/>
-              </a:fontRef>
-            </p:style>
-          </p:cxnSp>
-          <p:cxnSp>
-            <p:nvCxnSpPr>
-              <p:cNvPr id="19" name="Straight Arrow Connector 18">
-                <a:extLst>
-                  <a:ext uri="{FF2B5EF4-FFF2-40B4-BE49-F238E27FC236}">
-                    <a16:creationId xmlns:a16="http://schemas.microsoft.com/office/drawing/2014/main" id="{EC6C8ADA-CD46-4F26-1D94-A2F0E9576103}"/>
-                  </a:ext>
-                </a:extLst>
-              </p:cNvPr>
-              <p:cNvCxnSpPr>
-                <a:cxnSpLocks/>
-              </p:cNvCxnSpPr>
-              <p:nvPr/>
-            </p:nvCxnSpPr>
-            <p:spPr>
-              <a:xfrm flipV="1">
-                <a:off x="6894788" y="2829148"/>
-                <a:ext cx="1241212" cy="30938"/>
-              </a:xfrm>
-              <a:prstGeom prst="straightConnector1">
-                <a:avLst/>
-              </a:prstGeom>
-              <a:ln w="76200">
-                <a:solidFill>
-                  <a:schemeClr val="bg1">
-                    <a:lumMod val="50000"/>
-                  </a:schemeClr>
-                </a:solidFill>
-                <a:tailEnd type="triangle"/>
-              </a:ln>
-            </p:spPr>
-            <p:style>
-              <a:lnRef idx="2">
-                <a:schemeClr val="accent1"/>
-              </a:lnRef>
-              <a:fillRef idx="0">
-                <a:schemeClr val="accent1"/>
-              </a:fillRef>
-              <a:effectRef idx="1">
-                <a:schemeClr val="accent1"/>
-              </a:effectRef>
-              <a:fontRef idx="minor">
-                <a:schemeClr val="tx1"/>
-              </a:fontRef>
-            </p:style>
-          </p:cxnSp>
-        </p:grpSp>
-        <mc:AlternateContent xmlns:mc="http://schemas.openxmlformats.org/markup-compatibility/2006">
-          <mc:Choice xmlns:a14="http://schemas.microsoft.com/office/drawing/2010/main" Requires="a14">
-            <p:sp>
-              <p:nvSpPr>
-                <p:cNvPr id="21" name="TextBox 20">
-                  <a:extLst>
-                    <a:ext uri="{FF2B5EF4-FFF2-40B4-BE49-F238E27FC236}">
-                      <a16:creationId xmlns:a16="http://schemas.microsoft.com/office/drawing/2014/main" id="{2894E016-1DED-8934-5200-E9E093A7E0BC}"/>
-                    </a:ext>
-                  </a:extLst>
-                </p:cNvPr>
-                <p:cNvSpPr txBox="1"/>
-                <p:nvPr/>
-              </p:nvSpPr>
-              <p:spPr>
-                <a:xfrm>
-                  <a:off x="1776461" y="4668998"/>
-                  <a:ext cx="604333" cy="553998"/>
-                </a:xfrm>
-                <a:prstGeom prst="rect">
-                  <a:avLst/>
-                </a:prstGeom>
-                <a:noFill/>
-              </p:spPr>
-              <p:txBody>
-                <a:bodyPr wrap="none" lIns="0" tIns="0" rIns="0" bIns="0" rtlCol="0">
-                  <a:spAutoFit/>
-                </a:bodyPr>
-                <a:lstStyle/>
-                <a:p>
-                  <a14:m>
-                    <m:oMathPara xmlns:m="http://schemas.openxmlformats.org/officeDocument/2006/math">
-                      <m:oMathParaPr>
-                        <m:jc m:val="centerGroup"/>
-                      </m:oMathParaPr>
-                      <m:oMath xmlns:m="http://schemas.openxmlformats.org/officeDocument/2006/math">
-                        <m:r>
-                          <a:rPr lang="en-US" sz="3600" b="0" i="1" smtClean="0">
-                            <a:latin typeface="Cambria Math" panose="02040503050406030204" pitchFamily="18" charset="0"/>
-                          </a:rPr>
-                          <m:t>70</m:t>
-                        </m:r>
-                      </m:oMath>
-                    </m:oMathPara>
-                  </a14:m>
-                  <a:endParaRPr lang="en-US" sz="3600" dirty="0"/>
-                </a:p>
-              </p:txBody>
-            </p:sp>
-          </mc:Choice>
-          <mc:Fallback>
-            <p:sp>
-              <p:nvSpPr>
-                <p:cNvPr id="21" name="TextBox 20">
-                  <a:extLst>
-                    <a:ext uri="{FF2B5EF4-FFF2-40B4-BE49-F238E27FC236}">
-                      <a16:creationId xmlns:a16="http://schemas.microsoft.com/office/drawing/2014/main" id="{2894E016-1DED-8934-5200-E9E093A7E0BC}"/>
-                    </a:ext>
-                  </a:extLst>
-                </p:cNvPr>
-                <p:cNvSpPr txBox="1">
-                  <a:spLocks noRot="1" noChangeAspect="1" noMove="1" noResize="1" noEditPoints="1" noAdjustHandles="1" noChangeArrowheads="1" noChangeShapeType="1" noTextEdit="1"/>
-                </p:cNvSpPr>
-                <p:nvPr/>
-              </p:nvSpPr>
-              <p:spPr>
-                <a:xfrm>
-                  <a:off x="1776461" y="4668998"/>
-                  <a:ext cx="604333" cy="553998"/>
-                </a:xfrm>
-                <a:prstGeom prst="rect">
-                  <a:avLst/>
-                </a:prstGeom>
-                <a:blipFill>
-                  <a:blip r:embed="rId4"/>
-                  <a:stretch>
-                    <a:fillRect l="-16327" r="-16327" b="-2222"/>
-                  </a:stretch>
-                </a:blipFill>
-              </p:spPr>
-              <p:txBody>
-                <a:bodyPr/>
-                <a:lstStyle/>
-                <a:p>
-                  <a:r>
-                    <a:rPr lang="en-US">
-                      <a:noFill/>
-                    </a:rPr>
-                    <a:t> </a:t>
-                  </a:r>
-                </a:p>
-              </p:txBody>
-            </p:sp>
-          </mc:Fallback>
-        </mc:AlternateContent>
-      </p:grpSp>
-      <p:grpSp>
-        <p:nvGrpSpPr>
-          <p:cNvPr id="28" name="Group 27">
-            <a:extLst>
-              <a:ext uri="{FF2B5EF4-FFF2-40B4-BE49-F238E27FC236}">
-                <a16:creationId xmlns:a16="http://schemas.microsoft.com/office/drawing/2014/main" id="{E6131264-CD0A-08D7-1D35-652C809C006B}"/>
-              </a:ext>
-            </a:extLst>
-          </p:cNvPr>
-          <p:cNvGrpSpPr/>
-          <p:nvPr/>
-        </p:nvGrpSpPr>
-        <p:grpSpPr>
-          <a:xfrm>
-            <a:off x="577144" y="2658456"/>
-            <a:ext cx="9427837" cy="1261241"/>
-            <a:chOff x="-499301" y="2658456"/>
-            <a:chExt cx="9427837" cy="1261241"/>
-          </a:xfrm>
-        </p:grpSpPr>
-        <p:grpSp>
-          <p:nvGrpSpPr>
-            <p:cNvPr id="22" name="Group 21">
-              <a:extLst>
-                <a:ext uri="{FF2B5EF4-FFF2-40B4-BE49-F238E27FC236}">
-                  <a16:creationId xmlns:a16="http://schemas.microsoft.com/office/drawing/2014/main" id="{F47366C1-EC5E-12C4-D6B9-22B078CF8813}"/>
-                </a:ext>
-              </a:extLst>
-            </p:cNvPr>
-            <p:cNvGrpSpPr/>
-            <p:nvPr/>
-          </p:nvGrpSpPr>
-          <p:grpSpPr>
-            <a:xfrm>
-              <a:off x="2296511" y="2658456"/>
-              <a:ext cx="6632025" cy="1261241"/>
-              <a:chOff x="2532994" y="2229466"/>
-              <a:chExt cx="6632025" cy="1261241"/>
-            </a:xfrm>
-          </p:grpSpPr>
-          <mc:AlternateContent xmlns:mc="http://schemas.openxmlformats.org/markup-compatibility/2006">
-            <mc:Choice xmlns:a14="http://schemas.microsoft.com/office/drawing/2010/main" Requires="a14">
-              <p:sp>
-                <p:nvSpPr>
-                  <p:cNvPr id="23" name="Rectangle 22">
-                    <a:extLst>
-                      <a:ext uri="{FF2B5EF4-FFF2-40B4-BE49-F238E27FC236}">
-                        <a16:creationId xmlns:a16="http://schemas.microsoft.com/office/drawing/2014/main" id="{108CA430-570E-D900-4294-58E99DC0CA5F}"/>
-                      </a:ext>
-                    </a:extLst>
-                  </p:cNvPr>
-                  <p:cNvSpPr/>
-                  <p:nvPr/>
-                </p:nvSpPr>
-                <p:spPr>
-                  <a:xfrm>
-                    <a:off x="3815255" y="2229466"/>
-                    <a:ext cx="3079533" cy="1261241"/>
-                  </a:xfrm>
-                  <a:prstGeom prst="rect">
-                    <a:avLst/>
-                  </a:prstGeom>
-                  <a:ln w="38100">
-                    <a:solidFill>
-                      <a:schemeClr val="tx1"/>
-                    </a:solidFill>
-                  </a:ln>
-                </p:spPr>
-                <p:style>
-                  <a:lnRef idx="2">
-                    <a:schemeClr val="accent6"/>
-                  </a:lnRef>
-                  <a:fillRef idx="1">
-                    <a:schemeClr val="lt1"/>
-                  </a:fillRef>
-                  <a:effectRef idx="0">
-                    <a:schemeClr val="accent6"/>
-                  </a:effectRef>
-                  <a:fontRef idx="minor">
-                    <a:schemeClr val="dk1"/>
-                  </a:fontRef>
-                </p:style>
-                <p:txBody>
-                  <a:bodyPr rtlCol="0" anchor="ctr"/>
-                  <a:lstStyle/>
-                  <a:p>
-                    <a:pPr algn="ctr"/>
-                    <a14:m>
-                      <m:oMathPara xmlns:m="http://schemas.openxmlformats.org/officeDocument/2006/math">
-                        <m:oMathParaPr>
-                          <m:jc m:val="centerGroup"/>
-                        </m:oMathParaPr>
-                        <m:oMath xmlns:m="http://schemas.openxmlformats.org/officeDocument/2006/math">
-                          <m:r>
-                            <a:rPr lang="en-US" sz="3200" b="0" i="1" smtClean="0">
-                              <a:latin typeface="Cambria Math" panose="02040503050406030204" pitchFamily="18" charset="0"/>
-                            </a:rPr>
-                            <m:t>𝑎</m:t>
-                          </m:r>
-                          <m:r>
-                            <a:rPr lang="en-US" sz="3200" b="0" i="1" smtClean="0">
-                              <a:latin typeface="Cambria Math" panose="02040503050406030204" pitchFamily="18" charset="0"/>
-                            </a:rPr>
-                            <m:t>+</m:t>
-                          </m:r>
-                          <m:r>
-                            <a:rPr lang="en-US" sz="3200" b="0" i="1" smtClean="0">
-                              <a:latin typeface="Cambria Math" panose="02040503050406030204" pitchFamily="18" charset="0"/>
-                            </a:rPr>
-                            <m:t>𝑏</m:t>
-                          </m:r>
-                          <m:r>
-                            <a:rPr lang="en-US" sz="3200" b="0" i="1" smtClean="0">
-                              <a:latin typeface="Cambria Math" panose="02040503050406030204" pitchFamily="18" charset="0"/>
-                            </a:rPr>
-                            <m:t>∗</m:t>
-                          </m:r>
-                          <m:r>
-                            <a:rPr lang="en-US" sz="3200" b="0" i="1" smtClean="0">
-                              <a:latin typeface="Cambria Math" panose="02040503050406030204" pitchFamily="18" charset="0"/>
-                            </a:rPr>
-                            <m:t>𝑡</m:t>
-                          </m:r>
-                        </m:oMath>
-                      </m:oMathPara>
-                    </a14:m>
-                    <a:endParaRPr lang="en-US" sz="3200" dirty="0"/>
-                  </a:p>
-                </p:txBody>
-              </p:sp>
-            </mc:Choice>
-            <mc:Fallback>
-              <p:sp>
-                <p:nvSpPr>
-                  <p:cNvPr id="23" name="Rectangle 22">
-                    <a:extLst>
-                      <a:ext uri="{FF2B5EF4-FFF2-40B4-BE49-F238E27FC236}">
-                        <a16:creationId xmlns:a16="http://schemas.microsoft.com/office/drawing/2014/main" id="{108CA430-570E-D900-4294-58E99DC0CA5F}"/>
-                      </a:ext>
-                    </a:extLst>
-                  </p:cNvPr>
-                  <p:cNvSpPr>
-                    <a:spLocks noRot="1" noChangeAspect="1" noMove="1" noResize="1" noEditPoints="1" noAdjustHandles="1" noChangeArrowheads="1" noChangeShapeType="1" noTextEdit="1"/>
-                  </p:cNvSpPr>
-                  <p:nvPr/>
-                </p:nvSpPr>
-                <p:spPr>
-                  <a:xfrm>
-                    <a:off x="3815255" y="2229466"/>
-                    <a:ext cx="3079533" cy="1261241"/>
-                  </a:xfrm>
-                  <a:prstGeom prst="rect">
-                    <a:avLst/>
-                  </a:prstGeom>
-                  <a:blipFill>
-                    <a:blip r:embed="rId5"/>
-                    <a:stretch>
-                      <a:fillRect/>
-                    </a:stretch>
-                  </a:blipFill>
-                  <a:ln w="38100">
-                    <a:solidFill>
-                      <a:schemeClr val="tx1"/>
-                    </a:solidFill>
-                  </a:ln>
-                </p:spPr>
-                <p:txBody>
-                  <a:bodyPr/>
-                  <a:lstStyle/>
-                  <a:p>
-                    <a:r>
-                      <a:rPr lang="en-US">
-                        <a:noFill/>
-                      </a:rPr>
-                      <a:t> </a:t>
-                    </a:r>
-                  </a:p>
-                </p:txBody>
-              </p:sp>
-            </mc:Fallback>
-          </mc:AlternateContent>
-          <mc:AlternateContent xmlns:mc="http://schemas.openxmlformats.org/markup-compatibility/2006">
-            <mc:Choice xmlns:a14="http://schemas.microsoft.com/office/drawing/2010/main" Requires="a14">
-              <p:sp>
-                <p:nvSpPr>
-                  <p:cNvPr id="24" name="TextBox 23">
-                    <a:extLst>
-                      <a:ext uri="{FF2B5EF4-FFF2-40B4-BE49-F238E27FC236}">
-                        <a16:creationId xmlns:a16="http://schemas.microsoft.com/office/drawing/2014/main" id="{AF17F315-0772-B4CF-DECC-8C2B4727AFF6}"/>
-                      </a:ext>
-                    </a:extLst>
-                  </p:cNvPr>
-                  <p:cNvSpPr txBox="1"/>
-                  <p:nvPr/>
-                </p:nvSpPr>
-                <p:spPr>
-                  <a:xfrm>
-                    <a:off x="8177046" y="2503920"/>
-                    <a:ext cx="987973" cy="646331"/>
-                  </a:xfrm>
-                  <a:prstGeom prst="rect">
-                    <a:avLst/>
-                  </a:prstGeom>
-                  <a:noFill/>
-                </p:spPr>
-                <p:txBody>
-                  <a:bodyPr wrap="square" rtlCol="0">
-                    <a:spAutoFit/>
-                  </a:bodyPr>
-                  <a:lstStyle/>
-                  <a:p>
-                    <a14:m>
-                      <m:oMathPara xmlns:m="http://schemas.openxmlformats.org/officeDocument/2006/math">
-                        <m:oMathParaPr>
-                          <m:jc m:val="centerGroup"/>
-                        </m:oMathParaPr>
-                        <m:oMath xmlns:m="http://schemas.openxmlformats.org/officeDocument/2006/math">
-                          <m:acc>
-                            <m:accPr>
-                              <m:chr m:val="̂"/>
-                              <m:ctrlPr>
-                                <a:rPr lang="en-US" sz="3600" i="1" dirty="0" smtClean="0">
-                                  <a:latin typeface="Cambria Math" panose="02040503050406030204" pitchFamily="18" charset="0"/>
-                                </a:rPr>
-                              </m:ctrlPr>
-                            </m:accPr>
-                            <m:e>
-                              <m:r>
-                                <a:rPr lang="en-US" sz="3600" b="0" i="1" dirty="0" smtClean="0">
-                                  <a:latin typeface="Cambria Math" panose="02040503050406030204" pitchFamily="18" charset="0"/>
-                                </a:rPr>
-                                <m:t>𝑐𝑢𝑠𝑡𝑜𝑚𝑒𝑟𝑠</m:t>
-                              </m:r>
-                            </m:e>
-                          </m:acc>
-                        </m:oMath>
-                      </m:oMathPara>
-                    </a14:m>
-                  </a:p>
-                </p:txBody>
-              </p:sp>
-            </mc:Choice>
-            <mc:Fallback>
-              <p:sp>
-                <p:nvSpPr>
-                  <p:cNvPr id="24" name="TextBox 23">
-                    <a:extLst>
-                      <a:ext uri="{FF2B5EF4-FFF2-40B4-BE49-F238E27FC236}">
-                        <a16:creationId xmlns:a16="http://schemas.microsoft.com/office/drawing/2014/main" id="{AF17F315-0772-B4CF-DECC-8C2B4727AFF6}"/>
-                      </a:ext>
-                    </a:extLst>
-                  </p:cNvPr>
-                  <p:cNvSpPr txBox="1">
-                    <a:spLocks noRot="1" noChangeAspect="1" noMove="1" noResize="1" noEditPoints="1" noAdjustHandles="1" noChangeArrowheads="1" noChangeShapeType="1" noTextEdit="1"/>
-                  </p:cNvSpPr>
-                  <p:nvPr/>
-                </p:nvSpPr>
-                <p:spPr>
-                  <a:xfrm>
-                    <a:off x="8177046" y="2503920"/>
-                    <a:ext cx="987973" cy="646331"/>
-                  </a:xfrm>
-                  <a:prstGeom prst="rect">
-                    <a:avLst/>
-                  </a:prstGeom>
-                  <a:blipFill>
-                    <a:blip r:embed="rId6"/>
-                    <a:stretch>
-                      <a:fillRect l="-3797" t="-15385" r="-163291" b="-36538"/>
-                    </a:stretch>
-                  </a:blipFill>
-                </p:spPr>
-                <p:txBody>
-                  <a:bodyPr/>
-                  <a:lstStyle/>
-                  <a:p>
-                    <a:r>
-                      <a:rPr lang="en-US">
-                        <a:noFill/>
-                      </a:rPr>
-                      <a:t> </a:t>
-                    </a:r>
-                  </a:p>
-                </p:txBody>
-              </p:sp>
-            </mc:Fallback>
-          </mc:AlternateContent>
-          <p:cxnSp>
-            <p:nvCxnSpPr>
-              <p:cNvPr id="25" name="Straight Arrow Connector 24">
-                <a:extLst>
-                  <a:ext uri="{FF2B5EF4-FFF2-40B4-BE49-F238E27FC236}">
-                    <a16:creationId xmlns:a16="http://schemas.microsoft.com/office/drawing/2014/main" id="{4D6829DA-4215-60DB-9C36-E4B4EE0E13EA}"/>
-                  </a:ext>
-                </a:extLst>
-              </p:cNvPr>
-              <p:cNvCxnSpPr>
-                <a:cxnSpLocks/>
-              </p:cNvCxnSpPr>
-              <p:nvPr/>
-            </p:nvCxnSpPr>
-            <p:spPr>
-              <a:xfrm flipV="1">
-                <a:off x="2532994" y="2844698"/>
-                <a:ext cx="1282261" cy="6916"/>
-              </a:xfrm>
-              <a:prstGeom prst="straightConnector1">
-                <a:avLst/>
-              </a:prstGeom>
-              <a:ln w="76200">
-                <a:solidFill>
-                  <a:schemeClr val="bg1">
-                    <a:lumMod val="50000"/>
-                  </a:schemeClr>
-                </a:solidFill>
-                <a:tailEnd type="triangle"/>
-              </a:ln>
-            </p:spPr>
-            <p:style>
-              <a:lnRef idx="2">
-                <a:schemeClr val="accent1"/>
-              </a:lnRef>
-              <a:fillRef idx="0">
-                <a:schemeClr val="accent1"/>
-              </a:fillRef>
-              <a:effectRef idx="1">
-                <a:schemeClr val="accent1"/>
-              </a:effectRef>
-              <a:fontRef idx="minor">
-                <a:schemeClr val="tx1"/>
-              </a:fontRef>
-            </p:style>
-          </p:cxnSp>
-          <p:cxnSp>
-            <p:nvCxnSpPr>
-              <p:cNvPr id="26" name="Straight Arrow Connector 25">
-                <a:extLst>
-                  <a:ext uri="{FF2B5EF4-FFF2-40B4-BE49-F238E27FC236}">
-                    <a16:creationId xmlns:a16="http://schemas.microsoft.com/office/drawing/2014/main" id="{EDA9B41D-7F01-8B25-E5B3-51477B0EDB78}"/>
-                  </a:ext>
-                </a:extLst>
-              </p:cNvPr>
-              <p:cNvCxnSpPr>
-                <a:cxnSpLocks/>
-              </p:cNvCxnSpPr>
-              <p:nvPr/>
-            </p:nvCxnSpPr>
-            <p:spPr>
-              <a:xfrm flipV="1">
-                <a:off x="6894788" y="2829148"/>
-                <a:ext cx="1241212" cy="30938"/>
-              </a:xfrm>
-              <a:prstGeom prst="straightConnector1">
-                <a:avLst/>
-              </a:prstGeom>
-              <a:ln w="76200">
-                <a:solidFill>
-                  <a:schemeClr val="bg1">
-                    <a:lumMod val="50000"/>
-                  </a:schemeClr>
-                </a:solidFill>
-                <a:tailEnd type="triangle"/>
-              </a:ln>
-            </p:spPr>
-            <p:style>
-              <a:lnRef idx="2">
-                <a:schemeClr val="accent1"/>
-              </a:lnRef>
-              <a:fillRef idx="0">
-                <a:schemeClr val="accent1"/>
-              </a:fillRef>
-              <a:effectRef idx="1">
-                <a:schemeClr val="accent1"/>
-              </a:effectRef>
-              <a:fontRef idx="minor">
-                <a:schemeClr val="tx1"/>
-              </a:fontRef>
-            </p:style>
-          </p:cxnSp>
-        </p:grpSp>
-        <mc:AlternateContent xmlns:mc="http://schemas.openxmlformats.org/markup-compatibility/2006">
-          <mc:Choice xmlns:a14="http://schemas.microsoft.com/office/drawing/2010/main" Requires="a14">
-            <p:sp>
-              <p:nvSpPr>
-                <p:cNvPr id="27" name="TextBox 26">
-                  <a:extLst>
-                    <a:ext uri="{FF2B5EF4-FFF2-40B4-BE49-F238E27FC236}">
-                      <a16:creationId xmlns:a16="http://schemas.microsoft.com/office/drawing/2014/main" id="{7F07CC57-8E13-7016-C90F-02EBF5249DB9}"/>
-                    </a:ext>
-                  </a:extLst>
-                </p:cNvPr>
-                <p:cNvSpPr txBox="1"/>
-                <p:nvPr/>
-              </p:nvSpPr>
-              <p:spPr>
-                <a:xfrm>
-                  <a:off x="-499301" y="2971940"/>
-                  <a:ext cx="2762488" cy="553998"/>
-                </a:xfrm>
-                <a:prstGeom prst="rect">
-                  <a:avLst/>
-                </a:prstGeom>
-                <a:noFill/>
-              </p:spPr>
-              <p:txBody>
-                <a:bodyPr wrap="none" lIns="0" tIns="0" rIns="0" bIns="0" rtlCol="0">
-                  <a:spAutoFit/>
-                </a:bodyPr>
-                <a:lstStyle/>
-                <a:p>
-                  <a14:m>
-                    <m:oMathPara xmlns:m="http://schemas.openxmlformats.org/officeDocument/2006/math">
-                      <m:oMathParaPr>
-                        <m:jc m:val="centerGroup"/>
-                      </m:oMathParaPr>
-                      <m:oMath xmlns:m="http://schemas.openxmlformats.org/officeDocument/2006/math">
-                        <m:r>
-                          <a:rPr lang="en-US" sz="3600" b="0" i="1" smtClean="0">
-                            <a:latin typeface="Cambria Math" panose="02040503050406030204" pitchFamily="18" charset="0"/>
-                          </a:rPr>
-                          <m:t>𝑡𝑒𝑚𝑝𝑒𝑟𝑎𝑡𝑢𝑟𝑒</m:t>
-                        </m:r>
-                      </m:oMath>
-                    </m:oMathPara>
-                  </a14:m>
-                  <a:endParaRPr lang="en-US" sz="3600" dirty="0"/>
-                </a:p>
-              </p:txBody>
-            </p:sp>
-          </mc:Choice>
-          <mc:Fallback>
-            <p:sp>
-              <p:nvSpPr>
-                <p:cNvPr id="27" name="TextBox 26">
-                  <a:extLst>
-                    <a:ext uri="{FF2B5EF4-FFF2-40B4-BE49-F238E27FC236}">
-                      <a16:creationId xmlns:a16="http://schemas.microsoft.com/office/drawing/2014/main" id="{7F07CC57-8E13-7016-C90F-02EBF5249DB9}"/>
-                    </a:ext>
-                  </a:extLst>
-                </p:cNvPr>
-                <p:cNvSpPr txBox="1">
-                  <a:spLocks noRot="1" noChangeAspect="1" noMove="1" noResize="1" noEditPoints="1" noAdjustHandles="1" noChangeArrowheads="1" noChangeShapeType="1" noTextEdit="1"/>
-                </p:cNvSpPr>
-                <p:nvPr/>
-              </p:nvSpPr>
-              <p:spPr>
-                <a:xfrm>
-                  <a:off x="-499301" y="2971940"/>
-                  <a:ext cx="2762488" cy="553998"/>
-                </a:xfrm>
-                <a:prstGeom prst="rect">
-                  <a:avLst/>
-                </a:prstGeom>
-                <a:blipFill>
-                  <a:blip r:embed="rId7"/>
-                  <a:stretch>
-                    <a:fillRect l="-4566" r="-4110" b="-27273"/>
-                  </a:stretch>
-                </a:blipFill>
-              </p:spPr>
-              <p:txBody>
-                <a:bodyPr/>
-                <a:lstStyle/>
-                <a:p>
-                  <a:r>
-                    <a:rPr lang="en-US">
-                      <a:noFill/>
-                    </a:rPr>
-                    <a:t> </a:t>
-                  </a:r>
-                </a:p>
-              </p:txBody>
-            </p:sp>
-          </mc:Fallback>
-        </mc:AlternateContent>
-      </p:grpSp>
-    </p:spTree>
-    <p:extLst>
-      <p:ext uri="{BB962C8B-B14F-4D97-AF65-F5344CB8AC3E}">
-        <p14:creationId xmlns:p14="http://schemas.microsoft.com/office/powerpoint/2010/main" val="911215209"/>
-      </p:ext>
-    </p:extLst>
-  </p:cSld>
-  <p:clrMapOvr>
-    <a:masterClrMapping/>
-  </p:clrMapOvr>
-</p:sld>
-</file>
-
-<file path=ppt/slides/slide9.xml><?xml version="1.0" encoding="utf-8"?>
-<p:sld xmlns:a="http://schemas.openxmlformats.org/drawingml/2006/main" xmlns:r="http://schemas.openxmlformats.org/officeDocument/2006/relationships" xmlns:p="http://schemas.openxmlformats.org/presentationml/2006/main">
-  <p:cSld>
-    <p:spTree>
-      <p:nvGrpSpPr>
-        <p:cNvPr id="1" name=""/>
-        <p:cNvGrpSpPr/>
-        <p:nvPr/>
-      </p:nvGrpSpPr>
-      <p:grpSpPr>
-        <a:xfrm>
-          <a:off x="0" y="0"/>
-          <a:ext cx="0" cy="0"/>
-          <a:chOff x="0" y="0"/>
-          <a:chExt cx="0" cy="0"/>
-        </a:xfrm>
-      </p:grpSpPr>
-      <p:grpSp>
-        <p:nvGrpSpPr>
-          <p:cNvPr id="8" name="Group 7">
-            <a:extLst>
-              <a:ext uri="{FF2B5EF4-FFF2-40B4-BE49-F238E27FC236}">
-                <a16:creationId xmlns:a16="http://schemas.microsoft.com/office/drawing/2014/main" id="{73BA78C6-0A1C-4CB9-96AB-A54F44A6E764}"/>
-              </a:ext>
-            </a:extLst>
-          </p:cNvPr>
-          <p:cNvGrpSpPr/>
-          <p:nvPr/>
-        </p:nvGrpSpPr>
-        <p:grpSpPr>
-          <a:xfrm>
-            <a:off x="1680209" y="2446504"/>
-            <a:ext cx="7251924" cy="1261241"/>
-            <a:chOff x="1680209" y="2446504"/>
-            <a:chExt cx="7251924" cy="1261241"/>
-          </a:xfrm>
-        </p:grpSpPr>
-        <p:grpSp>
-          <p:nvGrpSpPr>
-            <p:cNvPr id="2" name="Group 1">
-              <a:extLst>
-                <a:ext uri="{FF2B5EF4-FFF2-40B4-BE49-F238E27FC236}">
-                  <a16:creationId xmlns:a16="http://schemas.microsoft.com/office/drawing/2014/main" id="{4CBF2273-C976-0C60-837B-46E1628716EE}"/>
-                </a:ext>
-              </a:extLst>
-            </p:cNvPr>
-            <p:cNvGrpSpPr/>
-            <p:nvPr/>
-          </p:nvGrpSpPr>
-          <p:grpSpPr>
-            <a:xfrm>
-              <a:off x="2300108" y="2446504"/>
-              <a:ext cx="6632025" cy="1261241"/>
-              <a:chOff x="2532994" y="2229466"/>
-              <a:chExt cx="6632025" cy="1261241"/>
-            </a:xfrm>
-          </p:grpSpPr>
-          <mc:AlternateContent xmlns:mc="http://schemas.openxmlformats.org/markup-compatibility/2006">
-            <mc:Choice xmlns:a14="http://schemas.microsoft.com/office/drawing/2010/main" Requires="a14">
-              <p:sp>
-                <p:nvSpPr>
-                  <p:cNvPr id="3" name="Rectangle 2">
-                    <a:extLst>
-                      <a:ext uri="{FF2B5EF4-FFF2-40B4-BE49-F238E27FC236}">
-                        <a16:creationId xmlns:a16="http://schemas.microsoft.com/office/drawing/2014/main" id="{084818F6-C7C0-5DF1-F745-47E963919782}"/>
-                      </a:ext>
-                    </a:extLst>
-                  </p:cNvPr>
-                  <p:cNvSpPr/>
-                  <p:nvPr/>
-                </p:nvSpPr>
-                <p:spPr>
-                  <a:xfrm>
-                    <a:off x="3815255" y="2229466"/>
-                    <a:ext cx="3079533" cy="1261241"/>
-                  </a:xfrm>
-                  <a:prstGeom prst="rect">
-                    <a:avLst/>
-                  </a:prstGeom>
-                  <a:ln w="38100">
-                    <a:solidFill>
-                      <a:schemeClr val="tx1"/>
-                    </a:solidFill>
-                  </a:ln>
-                </p:spPr>
-                <p:style>
-                  <a:lnRef idx="2">
-                    <a:schemeClr val="accent6"/>
-                  </a:lnRef>
-                  <a:fillRef idx="1">
-                    <a:schemeClr val="lt1"/>
-                  </a:fillRef>
-                  <a:effectRef idx="0">
-                    <a:schemeClr val="accent6"/>
-                  </a:effectRef>
-                  <a:fontRef idx="minor">
-                    <a:schemeClr val="dk1"/>
-                  </a:fontRef>
-                </p:style>
-                <p:txBody>
-                  <a:bodyPr rtlCol="0" anchor="ctr"/>
-                  <a:lstStyle/>
-                  <a:p>
-                    <a:pPr algn="ctr"/>
-                    <a14:m>
-                      <m:oMathPara xmlns:m="http://schemas.openxmlformats.org/officeDocument/2006/math">
-                        <m:oMathParaPr>
-                          <m:jc m:val="centerGroup"/>
-                        </m:oMathParaPr>
-                        <m:oMath xmlns:m="http://schemas.openxmlformats.org/officeDocument/2006/math">
-                          <m:r>
-                            <a:rPr lang="en-US" sz="3200" i="1" smtClean="0">
-                              <a:latin typeface="Cambria Math" panose="02040503050406030204" pitchFamily="18" charset="0"/>
-                            </a:rPr>
-                            <m:t>2</m:t>
-                          </m:r>
-                          <m:r>
-                            <a:rPr lang="en-US" sz="3200" b="0" i="1" smtClean="0">
-                              <a:latin typeface="Cambria Math" panose="02040503050406030204" pitchFamily="18" charset="0"/>
-                            </a:rPr>
-                            <m:t>2.06</m:t>
-                          </m:r>
-                          <m:r>
-                            <a:rPr lang="en-US" sz="3200" b="0" i="1" smtClean="0">
-                              <a:latin typeface="Cambria Math" panose="02040503050406030204" pitchFamily="18" charset="0"/>
-                            </a:rPr>
-                            <m:t>+1.42</m:t>
-                          </m:r>
-                          <m:r>
-                            <a:rPr lang="en-US" sz="3200" b="0" i="1" smtClean="0">
-                              <a:latin typeface="Cambria Math" panose="02040503050406030204" pitchFamily="18" charset="0"/>
-                            </a:rPr>
-                            <m:t>𝑡</m:t>
-                          </m:r>
-                        </m:oMath>
-                      </m:oMathPara>
-                    </a14:m>
-                    <a:endParaRPr lang="en-US" sz="3200" dirty="0"/>
-                  </a:p>
-                </p:txBody>
-              </p:sp>
-            </mc:Choice>
-            <mc:Fallback>
-              <p:sp>
-                <p:nvSpPr>
-                  <p:cNvPr id="3" name="Rectangle 2">
-                    <a:extLst>
-                      <a:ext uri="{FF2B5EF4-FFF2-40B4-BE49-F238E27FC236}">
-                        <a16:creationId xmlns:a16="http://schemas.microsoft.com/office/drawing/2014/main" id="{084818F6-C7C0-5DF1-F745-47E963919782}"/>
-                      </a:ext>
-                    </a:extLst>
-                  </p:cNvPr>
-                  <p:cNvSpPr>
-                    <a:spLocks noRot="1" noChangeAspect="1" noMove="1" noResize="1" noEditPoints="1" noAdjustHandles="1" noChangeArrowheads="1" noChangeShapeType="1" noTextEdit="1"/>
-                  </p:cNvSpPr>
-                  <p:nvPr/>
-                </p:nvSpPr>
-                <p:spPr>
-                  <a:xfrm>
-                    <a:off x="3815255" y="2229466"/>
-                    <a:ext cx="3079533" cy="1261241"/>
-                  </a:xfrm>
-                  <a:prstGeom prst="rect">
-                    <a:avLst/>
-                  </a:prstGeom>
-                  <a:blipFill>
-                    <a:blip r:embed="rId2"/>
-                    <a:stretch>
-                      <a:fillRect/>
-                    </a:stretch>
-                  </a:blipFill>
-                  <a:ln w="38100">
-                    <a:solidFill>
-                      <a:schemeClr val="tx1"/>
-                    </a:solidFill>
-                  </a:ln>
-                </p:spPr>
-                <p:txBody>
-                  <a:bodyPr/>
-                  <a:lstStyle/>
-                  <a:p>
-                    <a:r>
-                      <a:rPr lang="en-US">
-                        <a:noFill/>
-                      </a:rPr>
-                      <a:t> </a:t>
-                    </a:r>
-                  </a:p>
-                </p:txBody>
-              </p:sp>
-            </mc:Fallback>
-          </mc:AlternateContent>
-          <mc:AlternateContent xmlns:mc="http://schemas.openxmlformats.org/markup-compatibility/2006">
-            <mc:Choice xmlns:a14="http://schemas.microsoft.com/office/drawing/2010/main" Requires="a14">
-              <p:sp>
-                <p:nvSpPr>
-                  <p:cNvPr id="4" name="TextBox 3">
-                    <a:extLst>
-                      <a:ext uri="{FF2B5EF4-FFF2-40B4-BE49-F238E27FC236}">
-                        <a16:creationId xmlns:a16="http://schemas.microsoft.com/office/drawing/2014/main" id="{12B2922A-552F-4BA8-65F0-94F9A63B8B34}"/>
-                      </a:ext>
-                    </a:extLst>
-                  </p:cNvPr>
-                  <p:cNvSpPr txBox="1"/>
-                  <p:nvPr/>
-                </p:nvSpPr>
-                <p:spPr>
-                  <a:xfrm>
-                    <a:off x="8177046" y="2503920"/>
-                    <a:ext cx="987973" cy="646331"/>
-                  </a:xfrm>
-                  <a:prstGeom prst="rect">
-                    <a:avLst/>
-                  </a:prstGeom>
-                  <a:noFill/>
-                </p:spPr>
-                <p:txBody>
-                  <a:bodyPr wrap="square" rtlCol="0">
-                    <a:spAutoFit/>
-                  </a:bodyPr>
-                  <a:lstStyle/>
-                  <a:p>
-                    <a14:m>
-                      <m:oMathPara xmlns:m="http://schemas.openxmlformats.org/officeDocument/2006/math">
-                        <m:oMathParaPr>
-                          <m:jc m:val="centerGroup"/>
-                        </m:oMathParaPr>
-                        <m:oMath xmlns:m="http://schemas.openxmlformats.org/officeDocument/2006/math">
-                          <m:acc>
-                            <m:accPr>
-                              <m:chr m:val="̂"/>
-                              <m:ctrlPr>
-                                <a:rPr lang="en-US" sz="3600" i="1" dirty="0" smtClean="0">
-                                  <a:latin typeface="Cambria Math" panose="02040503050406030204" pitchFamily="18" charset="0"/>
-                                </a:rPr>
-                              </m:ctrlPr>
-                            </m:accPr>
-                            <m:e>
-                              <m:r>
-                                <a:rPr lang="en-US" sz="3600" b="0" i="1" dirty="0" smtClean="0">
-                                  <a:latin typeface="Cambria Math" panose="02040503050406030204" pitchFamily="18" charset="0"/>
-                                </a:rPr>
-                                <m:t>𝑐𝑢𝑠𝑡</m:t>
-                              </m:r>
-                            </m:e>
-                          </m:acc>
-                        </m:oMath>
-                      </m:oMathPara>
-                    </a14:m>
-                  </a:p>
-                </p:txBody>
-              </p:sp>
-            </mc:Choice>
-            <mc:Fallback>
-              <p:sp>
-                <p:nvSpPr>
-                  <p:cNvPr id="4" name="TextBox 3">
-                    <a:extLst>
-                      <a:ext uri="{FF2B5EF4-FFF2-40B4-BE49-F238E27FC236}">
-                        <a16:creationId xmlns:a16="http://schemas.microsoft.com/office/drawing/2014/main" id="{12B2922A-552F-4BA8-65F0-94F9A63B8B34}"/>
-                      </a:ext>
-                    </a:extLst>
-                  </p:cNvPr>
-                  <p:cNvSpPr txBox="1">
-                    <a:spLocks noRot="1" noChangeAspect="1" noMove="1" noResize="1" noEditPoints="1" noAdjustHandles="1" noChangeArrowheads="1" noChangeShapeType="1" noTextEdit="1"/>
-                  </p:cNvSpPr>
-                  <p:nvPr/>
-                </p:nvSpPr>
-                <p:spPr>
-                  <a:xfrm>
-                    <a:off x="8177046" y="2503920"/>
-                    <a:ext cx="987973" cy="646331"/>
-                  </a:xfrm>
-                  <a:prstGeom prst="rect">
-                    <a:avLst/>
-                  </a:prstGeom>
-                  <a:blipFill>
-                    <a:blip r:embed="rId3"/>
-                    <a:stretch>
-                      <a:fillRect l="-6329" t="-17647" r="-35443" b="-37255"/>
-                    </a:stretch>
-                  </a:blipFill>
-                </p:spPr>
-                <p:txBody>
-                  <a:bodyPr/>
-                  <a:lstStyle/>
-                  <a:p>
-                    <a:r>
-                      <a:rPr lang="en-US">
-                        <a:noFill/>
-                      </a:rPr>
-                      <a:t> </a:t>
-                    </a:r>
-                  </a:p>
-                </p:txBody>
-              </p:sp>
-            </mc:Fallback>
-          </mc:AlternateContent>
-          <p:cxnSp>
-            <p:nvCxnSpPr>
-              <p:cNvPr id="5" name="Straight Arrow Connector 4">
-                <a:extLst>
-                  <a:ext uri="{FF2B5EF4-FFF2-40B4-BE49-F238E27FC236}">
-                    <a16:creationId xmlns:a16="http://schemas.microsoft.com/office/drawing/2014/main" id="{6BFFB7FC-4CDE-D3CE-7D90-7676386C1C3B}"/>
-                  </a:ext>
-                </a:extLst>
-              </p:cNvPr>
-              <p:cNvCxnSpPr>
-                <a:cxnSpLocks/>
-              </p:cNvCxnSpPr>
-              <p:nvPr/>
-            </p:nvCxnSpPr>
-            <p:spPr>
-              <a:xfrm flipV="1">
-                <a:off x="2532994" y="2844698"/>
-                <a:ext cx="1282261" cy="6916"/>
-              </a:xfrm>
-              <a:prstGeom prst="straightConnector1">
-                <a:avLst/>
-              </a:prstGeom>
-              <a:ln w="76200">
-                <a:solidFill>
-                  <a:schemeClr val="bg1">
-                    <a:lumMod val="50000"/>
-                  </a:schemeClr>
-                </a:solidFill>
-                <a:tailEnd type="triangle"/>
-              </a:ln>
-            </p:spPr>
-            <p:style>
-              <a:lnRef idx="2">
-                <a:schemeClr val="accent1"/>
-              </a:lnRef>
-              <a:fillRef idx="0">
-                <a:schemeClr val="accent1"/>
-              </a:fillRef>
-              <a:effectRef idx="1">
-                <a:schemeClr val="accent1"/>
-              </a:effectRef>
-              <a:fontRef idx="minor">
-                <a:schemeClr val="tx1"/>
-              </a:fontRef>
-            </p:style>
-          </p:cxnSp>
-          <p:cxnSp>
-            <p:nvCxnSpPr>
-              <p:cNvPr id="6" name="Straight Arrow Connector 5">
-                <a:extLst>
-                  <a:ext uri="{FF2B5EF4-FFF2-40B4-BE49-F238E27FC236}">
-                    <a16:creationId xmlns:a16="http://schemas.microsoft.com/office/drawing/2014/main" id="{C16F0CE1-99D1-A444-B134-89A61D37EAA5}"/>
-                  </a:ext>
-                </a:extLst>
-              </p:cNvPr>
-              <p:cNvCxnSpPr>
-                <a:cxnSpLocks/>
-              </p:cNvCxnSpPr>
-              <p:nvPr/>
-            </p:nvCxnSpPr>
-            <p:spPr>
-              <a:xfrm flipV="1">
-                <a:off x="6894788" y="2829148"/>
-                <a:ext cx="1241212" cy="30938"/>
-              </a:xfrm>
-              <a:prstGeom prst="straightConnector1">
-                <a:avLst/>
-              </a:prstGeom>
-              <a:ln w="76200">
-                <a:solidFill>
-                  <a:schemeClr val="bg1">
-                    <a:lumMod val="50000"/>
-                  </a:schemeClr>
-                </a:solidFill>
-                <a:tailEnd type="triangle"/>
-              </a:ln>
-            </p:spPr>
-            <p:style>
-              <a:lnRef idx="2">
-                <a:schemeClr val="accent1"/>
-              </a:lnRef>
-              <a:fillRef idx="0">
-                <a:schemeClr val="accent1"/>
-              </a:fillRef>
-              <a:effectRef idx="1">
-                <a:schemeClr val="accent1"/>
-              </a:effectRef>
-              <a:fontRef idx="minor">
-                <a:schemeClr val="tx1"/>
-              </a:fontRef>
-            </p:style>
-          </p:cxnSp>
-        </p:grpSp>
-        <mc:AlternateContent xmlns:mc="http://schemas.openxmlformats.org/markup-compatibility/2006">
-          <mc:Choice xmlns:a14="http://schemas.microsoft.com/office/drawing/2010/main" Requires="a14">
-            <p:sp>
-              <p:nvSpPr>
-                <p:cNvPr id="7" name="TextBox 6">
-                  <a:extLst>
-                    <a:ext uri="{FF2B5EF4-FFF2-40B4-BE49-F238E27FC236}">
-                      <a16:creationId xmlns:a16="http://schemas.microsoft.com/office/drawing/2014/main" id="{2CF35532-8EBD-2090-F812-2C9BB9E4DB35}"/>
-                    </a:ext>
-                  </a:extLst>
-                </p:cNvPr>
-                <p:cNvSpPr txBox="1"/>
-                <p:nvPr/>
-              </p:nvSpPr>
-              <p:spPr>
-                <a:xfrm>
-                  <a:off x="1680209" y="2759988"/>
-                  <a:ext cx="288604" cy="553998"/>
-                </a:xfrm>
-                <a:prstGeom prst="rect">
-                  <a:avLst/>
-                </a:prstGeom>
-                <a:noFill/>
-              </p:spPr>
-              <p:txBody>
-                <a:bodyPr wrap="none" lIns="0" tIns="0" rIns="0" bIns="0" rtlCol="0">
-                  <a:spAutoFit/>
-                </a:bodyPr>
-                <a:lstStyle/>
-                <a:p>
-                  <a14:m>
-                    <m:oMathPara xmlns:m="http://schemas.openxmlformats.org/officeDocument/2006/math">
-                      <m:oMathParaPr>
-                        <m:jc m:val="centerGroup"/>
-                      </m:oMathParaPr>
-                      <m:oMath xmlns:m="http://schemas.openxmlformats.org/officeDocument/2006/math">
-                        <m:r>
-                          <a:rPr lang="en-US" sz="3600" b="0" i="1" smtClean="0">
-                            <a:latin typeface="Cambria Math" panose="02040503050406030204" pitchFamily="18" charset="0"/>
-                          </a:rPr>
-                          <m:t>𝑡</m:t>
-                        </m:r>
-                      </m:oMath>
-                    </m:oMathPara>
-                  </a14:m>
-                  <a:endParaRPr lang="en-US" sz="3600" dirty="0"/>
-                </a:p>
-              </p:txBody>
-            </p:sp>
-          </mc:Choice>
-          <mc:Fallback>
-            <p:sp>
-              <p:nvSpPr>
-                <p:cNvPr id="7" name="TextBox 6">
-                  <a:extLst>
-                    <a:ext uri="{FF2B5EF4-FFF2-40B4-BE49-F238E27FC236}">
-                      <a16:creationId xmlns:a16="http://schemas.microsoft.com/office/drawing/2014/main" id="{2CF35532-8EBD-2090-F812-2C9BB9E4DB35}"/>
-                    </a:ext>
-                  </a:extLst>
-                </p:cNvPr>
-                <p:cNvSpPr txBox="1">
-                  <a:spLocks noRot="1" noChangeAspect="1" noMove="1" noResize="1" noEditPoints="1" noAdjustHandles="1" noChangeArrowheads="1" noChangeShapeType="1" noTextEdit="1"/>
-                </p:cNvSpPr>
-                <p:nvPr/>
-              </p:nvSpPr>
-              <p:spPr>
-                <a:xfrm>
-                  <a:off x="1680209" y="2759988"/>
-                  <a:ext cx="288604" cy="553998"/>
-                </a:xfrm>
-                <a:prstGeom prst="rect">
-                  <a:avLst/>
-                </a:prstGeom>
-                <a:blipFill>
-                  <a:blip r:embed="rId4"/>
-                  <a:stretch>
-                    <a:fillRect l="-29167" r="-20833"/>
-                  </a:stretch>
-                </a:blipFill>
-              </p:spPr>
-              <p:txBody>
-                <a:bodyPr/>
-                <a:lstStyle/>
-                <a:p>
-                  <a:r>
-                    <a:rPr lang="en-US">
-                      <a:noFill/>
-                    </a:rPr>
-                    <a:t> </a:t>
-                  </a:r>
-                </a:p>
-              </p:txBody>
-            </p:sp>
-          </mc:Fallback>
-        </mc:AlternateContent>
-      </p:grpSp>
-    </p:spTree>
-    <p:extLst>
-      <p:ext uri="{BB962C8B-B14F-4D97-AF65-F5344CB8AC3E}">
-        <p14:creationId xmlns:p14="http://schemas.microsoft.com/office/powerpoint/2010/main" val="1398332104"/>
       </p:ext>
     </p:extLst>
   </p:cSld>
